--- a/Final/Figures/old_band_structure.pptx
+++ b/Final/Figures/old_band_structure.pptx
@@ -272,7 +272,7 @@
           <a:p>
             <a:fld id="{B56C1937-7717-4D31-9B2B-5A0EE407F3D0}" type="datetimeFigureOut">
               <a:rPr lang="zh-TW" altLang="en-US" smtClean="0"/>
-              <a:t>2026/3/17</a:t>
+              <a:t>2026/3/31</a:t>
             </a:fld>
             <a:endParaRPr lang="zh-TW" altLang="en-US"/>
           </a:p>
@@ -470,7 +470,7 @@
           <a:p>
             <a:fld id="{B56C1937-7717-4D31-9B2B-5A0EE407F3D0}" type="datetimeFigureOut">
               <a:rPr lang="zh-TW" altLang="en-US" smtClean="0"/>
-              <a:t>2026/3/17</a:t>
+              <a:t>2026/3/31</a:t>
             </a:fld>
             <a:endParaRPr lang="zh-TW" altLang="en-US"/>
           </a:p>
@@ -678,7 +678,7 @@
           <a:p>
             <a:fld id="{B56C1937-7717-4D31-9B2B-5A0EE407F3D0}" type="datetimeFigureOut">
               <a:rPr lang="zh-TW" altLang="en-US" smtClean="0"/>
-              <a:t>2026/3/17</a:t>
+              <a:t>2026/3/31</a:t>
             </a:fld>
             <a:endParaRPr lang="zh-TW" altLang="en-US"/>
           </a:p>
@@ -876,7 +876,7 @@
           <a:p>
             <a:fld id="{B56C1937-7717-4D31-9B2B-5A0EE407F3D0}" type="datetimeFigureOut">
               <a:rPr lang="zh-TW" altLang="en-US" smtClean="0"/>
-              <a:t>2026/3/17</a:t>
+              <a:t>2026/3/31</a:t>
             </a:fld>
             <a:endParaRPr lang="zh-TW" altLang="en-US"/>
           </a:p>
@@ -1151,7 +1151,7 @@
           <a:p>
             <a:fld id="{B56C1937-7717-4D31-9B2B-5A0EE407F3D0}" type="datetimeFigureOut">
               <a:rPr lang="zh-TW" altLang="en-US" smtClean="0"/>
-              <a:t>2026/3/17</a:t>
+              <a:t>2026/3/31</a:t>
             </a:fld>
             <a:endParaRPr lang="zh-TW" altLang="en-US"/>
           </a:p>
@@ -1416,7 +1416,7 @@
           <a:p>
             <a:fld id="{B56C1937-7717-4D31-9B2B-5A0EE407F3D0}" type="datetimeFigureOut">
               <a:rPr lang="zh-TW" altLang="en-US" smtClean="0"/>
-              <a:t>2026/3/17</a:t>
+              <a:t>2026/3/31</a:t>
             </a:fld>
             <a:endParaRPr lang="zh-TW" altLang="en-US"/>
           </a:p>
@@ -1828,7 +1828,7 @@
           <a:p>
             <a:fld id="{B56C1937-7717-4D31-9B2B-5A0EE407F3D0}" type="datetimeFigureOut">
               <a:rPr lang="zh-TW" altLang="en-US" smtClean="0"/>
-              <a:t>2026/3/17</a:t>
+              <a:t>2026/3/31</a:t>
             </a:fld>
             <a:endParaRPr lang="zh-TW" altLang="en-US"/>
           </a:p>
@@ -1969,7 +1969,7 @@
           <a:p>
             <a:fld id="{B56C1937-7717-4D31-9B2B-5A0EE407F3D0}" type="datetimeFigureOut">
               <a:rPr lang="zh-TW" altLang="en-US" smtClean="0"/>
-              <a:t>2026/3/17</a:t>
+              <a:t>2026/3/31</a:t>
             </a:fld>
             <a:endParaRPr lang="zh-TW" altLang="en-US"/>
           </a:p>
@@ -2082,7 +2082,7 @@
           <a:p>
             <a:fld id="{B56C1937-7717-4D31-9B2B-5A0EE407F3D0}" type="datetimeFigureOut">
               <a:rPr lang="zh-TW" altLang="en-US" smtClean="0"/>
-              <a:t>2026/3/17</a:t>
+              <a:t>2026/3/31</a:t>
             </a:fld>
             <a:endParaRPr lang="zh-TW" altLang="en-US"/>
           </a:p>
@@ -2393,7 +2393,7 @@
           <a:p>
             <a:fld id="{B56C1937-7717-4D31-9B2B-5A0EE407F3D0}" type="datetimeFigureOut">
               <a:rPr lang="zh-TW" altLang="en-US" smtClean="0"/>
-              <a:t>2026/3/17</a:t>
+              <a:t>2026/3/31</a:t>
             </a:fld>
             <a:endParaRPr lang="zh-TW" altLang="en-US"/>
           </a:p>
@@ -2681,7 +2681,7 @@
           <a:p>
             <a:fld id="{B56C1937-7717-4D31-9B2B-5A0EE407F3D0}" type="datetimeFigureOut">
               <a:rPr lang="zh-TW" altLang="en-US" smtClean="0"/>
-              <a:t>2026/3/17</a:t>
+              <a:t>2026/3/31</a:t>
             </a:fld>
             <a:endParaRPr lang="zh-TW" altLang="en-US"/>
           </a:p>
@@ -2922,7 +2922,7 @@
           <a:p>
             <a:fld id="{B56C1937-7717-4D31-9B2B-5A0EE407F3D0}" type="datetimeFigureOut">
               <a:rPr lang="zh-TW" altLang="en-US" smtClean="0"/>
-              <a:t>2026/3/17</a:t>
+              <a:t>2026/3/31</a:t>
             </a:fld>
             <a:endParaRPr lang="zh-TW" altLang="en-US"/>
           </a:p>
@@ -5213,12 +5213,186 @@
           </a:p>
         </p:txBody>
       </p:sp>
+      <p:pic>
+        <p:nvPicPr>
+          <p:cNvPr id="3" name="Picture 2" descr="Fig. 1: Strain impact on the band structure.">
+            <a:extLst>
+              <a:ext uri="{FF2B5EF4-FFF2-40B4-BE49-F238E27FC236}">
+                <a16:creationId xmlns:a16="http://schemas.microsoft.com/office/drawing/2014/main" id="{89E8B629-EAB1-453A-B11A-7BF85637AFE3}"/>
+              </a:ext>
+            </a:extLst>
+          </p:cNvPr>
+          <p:cNvPicPr>
+            <a:picLocks noChangeAspect="1" noChangeArrowheads="1"/>
+          </p:cNvPicPr>
+          <p:nvPr/>
+        </p:nvPicPr>
+        <p:blipFill rotWithShape="1">
+          <a:blip r:embed="rId2">
+            <a:clrChange>
+              <a:clrFrom>
+                <a:srgbClr val="FFFFFF"/>
+              </a:clrFrom>
+              <a:clrTo>
+                <a:srgbClr val="FFFFFF">
+                  <a:alpha val="0"/>
+                </a:srgbClr>
+              </a:clrTo>
+            </a:clrChange>
+            <a:extLst>
+              <a:ext uri="{28A0092B-C50C-407E-A947-70E740481C1C}">
+                <a14:useLocalDpi xmlns:a14="http://schemas.microsoft.com/office/drawing/2010/main" val="0"/>
+              </a:ext>
+            </a:extLst>
+          </a:blip>
+          <a:srcRect l="7368" t="1626" b="76758"/>
+          <a:stretch/>
+        </p:blipFill>
+        <p:spPr bwMode="auto">
+          <a:xfrm>
+            <a:off x="1240896" y="641209"/>
+            <a:ext cx="4952244" cy="2147288"/>
+          </a:xfrm>
+          <a:prstGeom prst="rect">
+            <a:avLst/>
+          </a:prstGeom>
+          <a:solidFill>
+            <a:schemeClr val="bg1"/>
+          </a:solidFill>
+          <a:extLst/>
+        </p:spPr>
+      </p:pic>
+      <p:pic>
+        <p:nvPicPr>
+          <p:cNvPr id="4" name="Picture 2" descr="Fig. 1: Strain impact on the band structure.">
+            <a:extLst>
+              <a:ext uri="{FF2B5EF4-FFF2-40B4-BE49-F238E27FC236}">
+                <a16:creationId xmlns:a16="http://schemas.microsoft.com/office/drawing/2014/main" id="{44D139E6-728A-4D81-AFB5-EFD4AB0D01AD}"/>
+              </a:ext>
+            </a:extLst>
+          </p:cNvPr>
+          <p:cNvPicPr>
+            <a:picLocks noChangeAspect="1" noChangeArrowheads="1"/>
+          </p:cNvPicPr>
+          <p:nvPr/>
+        </p:nvPicPr>
+        <p:blipFill rotWithShape="1">
+          <a:blip r:embed="rId2">
+            <a:clrChange>
+              <a:clrFrom>
+                <a:srgbClr val="FFFFFF"/>
+              </a:clrFrom>
+              <a:clrTo>
+                <a:srgbClr val="FFFFFF">
+                  <a:alpha val="0"/>
+                </a:srgbClr>
+              </a:clrTo>
+            </a:clrChange>
+            <a:extLst>
+              <a:ext uri="{28A0092B-C50C-407E-A947-70E740481C1C}">
+                <a14:useLocalDpi xmlns:a14="http://schemas.microsoft.com/office/drawing/2010/main" val="0"/>
+              </a:ext>
+            </a:extLst>
+          </a:blip>
+          <a:srcRect l="11422" t="25667" r="25465" b="39450"/>
+          <a:stretch/>
+        </p:blipFill>
+        <p:spPr bwMode="auto">
+          <a:xfrm>
+            <a:off x="2035101" y="3631693"/>
+            <a:ext cx="2944237" cy="3023586"/>
+          </a:xfrm>
+          <a:prstGeom prst="rect">
+            <a:avLst/>
+          </a:prstGeom>
+          <a:solidFill>
+            <a:schemeClr val="bg1"/>
+          </a:solidFill>
+          <a:extLst/>
+        </p:spPr>
+      </p:pic>
+      <p:sp>
+        <p:nvSpPr>
+          <p:cNvPr id="5" name="文字方塊 4">
+            <a:extLst>
+              <a:ext uri="{FF2B5EF4-FFF2-40B4-BE49-F238E27FC236}">
+                <a16:creationId xmlns:a16="http://schemas.microsoft.com/office/drawing/2014/main" id="{ACC082BF-5EB1-422D-ABE3-276283DC13C3}"/>
+              </a:ext>
+            </a:extLst>
+          </p:cNvPr>
+          <p:cNvSpPr txBox="1"/>
+          <p:nvPr/>
+        </p:nvSpPr>
+        <p:spPr>
+          <a:xfrm>
+            <a:off x="850909" y="202721"/>
+            <a:ext cx="472614" cy="462382"/>
+          </a:xfrm>
+          <a:prstGeom prst="rect">
+            <a:avLst/>
+          </a:prstGeom>
+          <a:solidFill>
+            <a:schemeClr val="bg1"/>
+          </a:solidFill>
+        </p:spPr>
+        <p:txBody>
+          <a:bodyPr wrap="square" rtlCol="0">
+            <a:spAutoFit/>
+          </a:bodyPr>
+          <a:lstStyle/>
+          <a:p>
+            <a:r>
+              <a:rPr lang="en-US" altLang="zh-TW" dirty="0"/>
+              <a:t>(a)</a:t>
+            </a:r>
+            <a:endParaRPr lang="zh-TW" altLang="en-US" dirty="0"/>
+          </a:p>
+        </p:txBody>
+      </p:sp>
+      <p:sp>
+        <p:nvSpPr>
+          <p:cNvPr id="6" name="文字方塊 5">
+            <a:extLst>
+              <a:ext uri="{FF2B5EF4-FFF2-40B4-BE49-F238E27FC236}">
+                <a16:creationId xmlns:a16="http://schemas.microsoft.com/office/drawing/2014/main" id="{72607E1D-58DF-47C2-928C-004560B835BC}"/>
+              </a:ext>
+            </a:extLst>
+          </p:cNvPr>
+          <p:cNvSpPr txBox="1"/>
+          <p:nvPr/>
+        </p:nvSpPr>
+        <p:spPr>
+          <a:xfrm>
+            <a:off x="800914" y="3315080"/>
+            <a:ext cx="472614" cy="462382"/>
+          </a:xfrm>
+          <a:prstGeom prst="rect">
+            <a:avLst/>
+          </a:prstGeom>
+          <a:solidFill>
+            <a:schemeClr val="bg1"/>
+          </a:solidFill>
+        </p:spPr>
+        <p:txBody>
+          <a:bodyPr wrap="square" rtlCol="0">
+            <a:spAutoFit/>
+          </a:bodyPr>
+          <a:lstStyle/>
+          <a:p>
+            <a:r>
+              <a:rPr lang="en-US" altLang="zh-TW" dirty="0"/>
+              <a:t>(b)</a:t>
+            </a:r>
+            <a:endParaRPr lang="zh-TW" altLang="en-US" dirty="0"/>
+          </a:p>
+        </p:txBody>
+      </p:sp>
       <p:grpSp>
         <p:nvGrpSpPr>
-          <p:cNvPr id="57" name="群組 56">
-            <a:extLst>
-              <a:ext uri="{FF2B5EF4-FFF2-40B4-BE49-F238E27FC236}">
-                <a16:creationId xmlns:a16="http://schemas.microsoft.com/office/drawing/2014/main" id="{165F014D-1454-44CE-8018-B21BFDA3DCDB}"/>
+          <p:cNvPr id="19" name="群組 18">
+            <a:extLst>
+              <a:ext uri="{FF2B5EF4-FFF2-40B4-BE49-F238E27FC236}">
+                <a16:creationId xmlns:a16="http://schemas.microsoft.com/office/drawing/2014/main" id="{8B6EF3B2-4585-4A48-B535-0A7275EB17E1}"/>
               </a:ext>
             </a:extLst>
           </p:cNvPr>
@@ -5227,387 +5401,21 @@
         </p:nvGrpSpPr>
         <p:grpSpPr>
           <a:xfrm>
-            <a:off x="800914" y="202721"/>
-            <a:ext cx="10069409" cy="6484259"/>
-            <a:chOff x="800914" y="202721"/>
-            <a:chExt cx="10069409" cy="6484259"/>
+            <a:off x="6612420" y="726962"/>
+            <a:ext cx="2038229" cy="2008861"/>
+            <a:chOff x="3601272" y="3280006"/>
+            <a:chExt cx="2073763" cy="2043883"/>
           </a:xfrm>
+          <a:solidFill>
+            <a:schemeClr val="bg1"/>
+          </a:solidFill>
         </p:grpSpPr>
-        <p:pic>
-          <p:nvPicPr>
-            <p:cNvPr id="3" name="Picture 2" descr="Fig. 1: Strain impact on the band structure.">
+        <p:sp>
+          <p:nvSpPr>
+            <p:cNvPr id="33" name="六邊形 32">
               <a:extLst>
                 <a:ext uri="{FF2B5EF4-FFF2-40B4-BE49-F238E27FC236}">
-                  <a16:creationId xmlns:a16="http://schemas.microsoft.com/office/drawing/2014/main" id="{89E8B629-EAB1-453A-B11A-7BF85637AFE3}"/>
-                </a:ext>
-              </a:extLst>
-            </p:cNvPr>
-            <p:cNvPicPr>
-              <a:picLocks noChangeAspect="1" noChangeArrowheads="1"/>
-            </p:cNvPicPr>
-            <p:nvPr/>
-          </p:nvPicPr>
-          <p:blipFill rotWithShape="1">
-            <a:blip r:embed="rId2">
-              <a:clrChange>
-                <a:clrFrom>
-                  <a:srgbClr val="FFFFFF"/>
-                </a:clrFrom>
-                <a:clrTo>
-                  <a:srgbClr val="FFFFFF">
-                    <a:alpha val="0"/>
-                  </a:srgbClr>
-                </a:clrTo>
-              </a:clrChange>
-              <a:extLst>
-                <a:ext uri="{28A0092B-C50C-407E-A947-70E740481C1C}">
-                  <a14:useLocalDpi xmlns:a14="http://schemas.microsoft.com/office/drawing/2010/main" val="0"/>
-                </a:ext>
-              </a:extLst>
-            </a:blip>
-            <a:srcRect l="7368" t="1626" b="76758"/>
-            <a:stretch/>
-          </p:blipFill>
-          <p:spPr bwMode="auto">
-            <a:xfrm>
-              <a:off x="1240896" y="641209"/>
-              <a:ext cx="4952244" cy="2147288"/>
-            </a:xfrm>
-            <a:prstGeom prst="rect">
-              <a:avLst/>
-            </a:prstGeom>
-            <a:solidFill>
-              <a:schemeClr val="bg1"/>
-            </a:solidFill>
-            <a:extLst/>
-          </p:spPr>
-        </p:pic>
-        <p:pic>
-          <p:nvPicPr>
-            <p:cNvPr id="4" name="Picture 2" descr="Fig. 1: Strain impact on the band structure.">
-              <a:extLst>
-                <a:ext uri="{FF2B5EF4-FFF2-40B4-BE49-F238E27FC236}">
-                  <a16:creationId xmlns:a16="http://schemas.microsoft.com/office/drawing/2014/main" id="{44D139E6-728A-4D81-AFB5-EFD4AB0D01AD}"/>
-                </a:ext>
-              </a:extLst>
-            </p:cNvPr>
-            <p:cNvPicPr>
-              <a:picLocks noChangeAspect="1" noChangeArrowheads="1"/>
-            </p:cNvPicPr>
-            <p:nvPr/>
-          </p:nvPicPr>
-          <p:blipFill rotWithShape="1">
-            <a:blip r:embed="rId2">
-              <a:clrChange>
-                <a:clrFrom>
-                  <a:srgbClr val="FFFFFF"/>
-                </a:clrFrom>
-                <a:clrTo>
-                  <a:srgbClr val="FFFFFF">
-                    <a:alpha val="0"/>
-                  </a:srgbClr>
-                </a:clrTo>
-              </a:clrChange>
-              <a:extLst>
-                <a:ext uri="{28A0092B-C50C-407E-A947-70E740481C1C}">
-                  <a14:useLocalDpi xmlns:a14="http://schemas.microsoft.com/office/drawing/2010/main" val="0"/>
-                </a:ext>
-              </a:extLst>
-            </a:blip>
-            <a:srcRect l="11422" t="25667" r="25465" b="39450"/>
-            <a:stretch/>
-          </p:blipFill>
-          <p:spPr bwMode="auto">
-            <a:xfrm>
-              <a:off x="2035101" y="3631693"/>
-              <a:ext cx="2944237" cy="3023586"/>
-            </a:xfrm>
-            <a:prstGeom prst="rect">
-              <a:avLst/>
-            </a:prstGeom>
-            <a:solidFill>
-              <a:schemeClr val="bg1"/>
-            </a:solidFill>
-            <a:extLst/>
-          </p:spPr>
-        </p:pic>
-        <p:sp>
-          <p:nvSpPr>
-            <p:cNvPr id="5" name="文字方塊 4">
-              <a:extLst>
-                <a:ext uri="{FF2B5EF4-FFF2-40B4-BE49-F238E27FC236}">
-                  <a16:creationId xmlns:a16="http://schemas.microsoft.com/office/drawing/2014/main" id="{ACC082BF-5EB1-422D-ABE3-276283DC13C3}"/>
-                </a:ext>
-              </a:extLst>
-            </p:cNvPr>
-            <p:cNvSpPr txBox="1"/>
-            <p:nvPr/>
-          </p:nvSpPr>
-          <p:spPr>
-            <a:xfrm>
-              <a:off x="850909" y="202721"/>
-              <a:ext cx="472614" cy="462382"/>
-            </a:xfrm>
-            <a:prstGeom prst="rect">
-              <a:avLst/>
-            </a:prstGeom>
-            <a:solidFill>
-              <a:schemeClr val="bg1"/>
-            </a:solidFill>
-          </p:spPr>
-          <p:txBody>
-            <a:bodyPr wrap="square" rtlCol="0">
-              <a:spAutoFit/>
-            </a:bodyPr>
-            <a:lstStyle/>
-            <a:p>
-              <a:r>
-                <a:rPr lang="en-US" altLang="zh-TW" dirty="0"/>
-                <a:t>(a)</a:t>
-              </a:r>
-              <a:endParaRPr lang="zh-TW" altLang="en-US" dirty="0"/>
-            </a:p>
-          </p:txBody>
-        </p:sp>
-        <p:sp>
-          <p:nvSpPr>
-            <p:cNvPr id="6" name="文字方塊 5">
-              <a:extLst>
-                <a:ext uri="{FF2B5EF4-FFF2-40B4-BE49-F238E27FC236}">
-                  <a16:creationId xmlns:a16="http://schemas.microsoft.com/office/drawing/2014/main" id="{72607E1D-58DF-47C2-928C-004560B835BC}"/>
-                </a:ext>
-              </a:extLst>
-            </p:cNvPr>
-            <p:cNvSpPr txBox="1"/>
-            <p:nvPr/>
-          </p:nvSpPr>
-          <p:spPr>
-            <a:xfrm>
-              <a:off x="800914" y="3315080"/>
-              <a:ext cx="472614" cy="462382"/>
-            </a:xfrm>
-            <a:prstGeom prst="rect">
-              <a:avLst/>
-            </a:prstGeom>
-            <a:solidFill>
-              <a:schemeClr val="bg1"/>
-            </a:solidFill>
-          </p:spPr>
-          <p:txBody>
-            <a:bodyPr wrap="square" rtlCol="0">
-              <a:spAutoFit/>
-            </a:bodyPr>
-            <a:lstStyle/>
-            <a:p>
-              <a:r>
-                <a:rPr lang="en-US" altLang="zh-TW" dirty="0"/>
-                <a:t>(b)</a:t>
-              </a:r>
-              <a:endParaRPr lang="zh-TW" altLang="en-US" dirty="0"/>
-            </a:p>
-          </p:txBody>
-        </p:sp>
-        <p:grpSp>
-          <p:nvGrpSpPr>
-            <p:cNvPr id="19" name="群組 18">
-              <a:extLst>
-                <a:ext uri="{FF2B5EF4-FFF2-40B4-BE49-F238E27FC236}">
-                  <a16:creationId xmlns:a16="http://schemas.microsoft.com/office/drawing/2014/main" id="{8B6EF3B2-4585-4A48-B535-0A7275EB17E1}"/>
-                </a:ext>
-              </a:extLst>
-            </p:cNvPr>
-            <p:cNvGrpSpPr/>
-            <p:nvPr/>
-          </p:nvGrpSpPr>
-          <p:grpSpPr>
-            <a:xfrm>
-              <a:off x="6612420" y="726962"/>
-              <a:ext cx="2038229" cy="2008861"/>
-              <a:chOff x="3601272" y="3280006"/>
-              <a:chExt cx="2073763" cy="2043883"/>
-            </a:xfrm>
-            <a:solidFill>
-              <a:schemeClr val="bg1"/>
-            </a:solidFill>
-          </p:grpSpPr>
-          <p:sp>
-            <p:nvSpPr>
-              <p:cNvPr id="33" name="六邊形 32">
-                <a:extLst>
-                  <a:ext uri="{FF2B5EF4-FFF2-40B4-BE49-F238E27FC236}">
-                    <a16:creationId xmlns:a16="http://schemas.microsoft.com/office/drawing/2014/main" id="{08A0A4BF-C844-44F2-8A8E-3119E5ABACFE}"/>
-                  </a:ext>
-                </a:extLst>
-              </p:cNvPr>
-              <p:cNvSpPr/>
-              <p:nvPr/>
-            </p:nvSpPr>
-            <p:spPr>
-              <a:xfrm>
-                <a:off x="3601272" y="3280006"/>
-                <a:ext cx="1185317" cy="1021743"/>
-              </a:xfrm>
-              <a:prstGeom prst="hexagon">
-                <a:avLst>
-                  <a:gd name="adj" fmla="val 29067"/>
-                  <a:gd name="vf" fmla="val 115470"/>
-                </a:avLst>
-              </a:prstGeom>
-              <a:grpFill/>
-              <a:ln>
-                <a:solidFill>
-                  <a:schemeClr val="bg1">
-                    <a:lumMod val="50000"/>
-                  </a:schemeClr>
-                </a:solidFill>
-              </a:ln>
-            </p:spPr>
-            <p:style>
-              <a:lnRef idx="2">
-                <a:schemeClr val="accent1">
-                  <a:shade val="50000"/>
-                </a:schemeClr>
-              </a:lnRef>
-              <a:fillRef idx="1">
-                <a:schemeClr val="accent1"/>
-              </a:fillRef>
-              <a:effectRef idx="0">
-                <a:schemeClr val="accent1"/>
-              </a:effectRef>
-              <a:fontRef idx="minor">
-                <a:schemeClr val="lt1"/>
-              </a:fontRef>
-            </p:style>
-            <p:txBody>
-              <a:bodyPr rtlCol="0" anchor="ctr"/>
-              <a:lstStyle/>
-              <a:p>
-                <a:pPr algn="ctr"/>
-                <a:endParaRPr lang="zh-TW" altLang="en-US" dirty="0"/>
-              </a:p>
-            </p:txBody>
-          </p:sp>
-          <p:sp>
-            <p:nvSpPr>
-              <p:cNvPr id="34" name="六邊形 33">
-                <a:extLst>
-                  <a:ext uri="{FF2B5EF4-FFF2-40B4-BE49-F238E27FC236}">
-                    <a16:creationId xmlns:a16="http://schemas.microsoft.com/office/drawing/2014/main" id="{C8BB11C7-0650-47C9-91BB-5D8347953840}"/>
-                  </a:ext>
-                </a:extLst>
-              </p:cNvPr>
-              <p:cNvSpPr/>
-              <p:nvPr/>
-            </p:nvSpPr>
-            <p:spPr>
-              <a:xfrm>
-                <a:off x="4489718" y="3791076"/>
-                <a:ext cx="1185317" cy="1021743"/>
-              </a:xfrm>
-              <a:prstGeom prst="hexagon">
-                <a:avLst>
-                  <a:gd name="adj" fmla="val 29067"/>
-                  <a:gd name="vf" fmla="val 115470"/>
-                </a:avLst>
-              </a:prstGeom>
-              <a:grpFill/>
-              <a:ln>
-                <a:solidFill>
-                  <a:schemeClr val="bg1">
-                    <a:lumMod val="50000"/>
-                  </a:schemeClr>
-                </a:solidFill>
-              </a:ln>
-            </p:spPr>
-            <p:style>
-              <a:lnRef idx="2">
-                <a:schemeClr val="accent1">
-                  <a:shade val="50000"/>
-                </a:schemeClr>
-              </a:lnRef>
-              <a:fillRef idx="1">
-                <a:schemeClr val="accent1"/>
-              </a:fillRef>
-              <a:effectRef idx="0">
-                <a:schemeClr val="accent1"/>
-              </a:effectRef>
-              <a:fontRef idx="minor">
-                <a:schemeClr val="lt1"/>
-              </a:fontRef>
-            </p:style>
-            <p:txBody>
-              <a:bodyPr rtlCol="0" anchor="ctr"/>
-              <a:lstStyle/>
-              <a:p>
-                <a:pPr algn="ctr"/>
-                <a:endParaRPr lang="zh-TW" altLang="en-US" dirty="0"/>
-              </a:p>
-            </p:txBody>
-          </p:sp>
-          <p:sp>
-            <p:nvSpPr>
-              <p:cNvPr id="35" name="六邊形 34">
-                <a:extLst>
-                  <a:ext uri="{FF2B5EF4-FFF2-40B4-BE49-F238E27FC236}">
-                    <a16:creationId xmlns:a16="http://schemas.microsoft.com/office/drawing/2014/main" id="{6E7512DF-B285-43AD-944F-FF01D93F114B}"/>
-                  </a:ext>
-                </a:extLst>
-              </p:cNvPr>
-              <p:cNvSpPr/>
-              <p:nvPr/>
-            </p:nvSpPr>
-            <p:spPr>
-              <a:xfrm>
-                <a:off x="3601272" y="4302146"/>
-                <a:ext cx="1185317" cy="1021743"/>
-              </a:xfrm>
-              <a:prstGeom prst="hexagon">
-                <a:avLst>
-                  <a:gd name="adj" fmla="val 29067"/>
-                  <a:gd name="vf" fmla="val 115470"/>
-                </a:avLst>
-              </a:prstGeom>
-              <a:grpFill/>
-              <a:ln>
-                <a:solidFill>
-                  <a:schemeClr val="bg1">
-                    <a:lumMod val="50000"/>
-                  </a:schemeClr>
-                </a:solidFill>
-              </a:ln>
-            </p:spPr>
-            <p:style>
-              <a:lnRef idx="2">
-                <a:schemeClr val="accent1">
-                  <a:shade val="50000"/>
-                </a:schemeClr>
-              </a:lnRef>
-              <a:fillRef idx="1">
-                <a:schemeClr val="accent1"/>
-              </a:fillRef>
-              <a:effectRef idx="0">
-                <a:schemeClr val="accent1"/>
-              </a:effectRef>
-              <a:fontRef idx="minor">
-                <a:schemeClr val="lt1"/>
-              </a:fontRef>
-            </p:style>
-            <p:txBody>
-              <a:bodyPr rtlCol="0" anchor="ctr"/>
-              <a:lstStyle/>
-              <a:p>
-                <a:pPr algn="ctr"/>
-                <a:endParaRPr lang="zh-TW" altLang="en-US" dirty="0"/>
-              </a:p>
-            </p:txBody>
-          </p:sp>
-        </p:grpSp>
-        <p:sp>
-          <p:nvSpPr>
-            <p:cNvPr id="20" name="橢圓 19">
-              <a:extLst>
-                <a:ext uri="{FF2B5EF4-FFF2-40B4-BE49-F238E27FC236}">
-                  <a16:creationId xmlns:a16="http://schemas.microsoft.com/office/drawing/2014/main" id="{E12CB9F5-BD5A-4E6D-A341-F21A6C1148B2}"/>
+                  <a16:creationId xmlns:a16="http://schemas.microsoft.com/office/drawing/2014/main" id="{08A0A4BF-C844-44F2-8A8E-3119E5ABACFE}"/>
                 </a:ext>
               </a:extLst>
             </p:cNvPr>
@@ -5616,710 +5424,8 @@
           </p:nvSpPr>
           <p:spPr>
             <a:xfrm>
-              <a:off x="6817153" y="1644560"/>
-              <a:ext cx="173669" cy="173664"/>
-            </a:xfrm>
-            <a:prstGeom prst="ellipse">
-              <a:avLst/>
-            </a:prstGeom>
-            <a:solidFill>
-              <a:srgbClr val="AAEEFF"/>
-            </a:solidFill>
-            <a:ln w="6350">
-              <a:solidFill>
-                <a:schemeClr val="tx1"/>
-              </a:solidFill>
-            </a:ln>
-          </p:spPr>
-          <p:style>
-            <a:lnRef idx="2">
-              <a:schemeClr val="dk1">
-                <a:shade val="50000"/>
-              </a:schemeClr>
-            </a:lnRef>
-            <a:fillRef idx="1">
-              <a:schemeClr val="dk1"/>
-            </a:fillRef>
-            <a:effectRef idx="0">
-              <a:schemeClr val="dk1"/>
-            </a:effectRef>
-            <a:fontRef idx="minor">
-              <a:schemeClr val="lt1"/>
-            </a:fontRef>
-          </p:style>
-          <p:txBody>
-            <a:bodyPr rtlCol="0" anchor="ctr"/>
-            <a:lstStyle/>
-            <a:p>
-              <a:pPr algn="ctr"/>
-              <a:endParaRPr lang="zh-TW" altLang="en-US"/>
-            </a:p>
-          </p:txBody>
-        </p:sp>
-        <p:sp>
-          <p:nvSpPr>
-            <p:cNvPr id="21" name="橢圓 20">
-              <a:extLst>
-                <a:ext uri="{FF2B5EF4-FFF2-40B4-BE49-F238E27FC236}">
-                  <a16:creationId xmlns:a16="http://schemas.microsoft.com/office/drawing/2014/main" id="{64519D7C-B262-47AF-AB3A-84DEE55D681F}"/>
-                </a:ext>
-              </a:extLst>
-            </p:cNvPr>
-            <p:cNvSpPr/>
-            <p:nvPr/>
-          </p:nvSpPr>
-          <p:spPr>
-            <a:xfrm>
-              <a:off x="7404993" y="1644560"/>
-              <a:ext cx="173669" cy="173664"/>
-            </a:xfrm>
-            <a:prstGeom prst="ellipse">
-              <a:avLst/>
-            </a:prstGeom>
-            <a:solidFill>
-              <a:srgbClr val="AAEEFF"/>
-            </a:solidFill>
-            <a:ln w="6350">
-              <a:solidFill>
-                <a:schemeClr val="tx1"/>
-              </a:solidFill>
-            </a:ln>
-          </p:spPr>
-          <p:style>
-            <a:lnRef idx="2">
-              <a:schemeClr val="dk1">
-                <a:shade val="50000"/>
-              </a:schemeClr>
-            </a:lnRef>
-            <a:fillRef idx="1">
-              <a:schemeClr val="dk1"/>
-            </a:fillRef>
-            <a:effectRef idx="0">
-              <a:schemeClr val="dk1"/>
-            </a:effectRef>
-            <a:fontRef idx="minor">
-              <a:schemeClr val="lt1"/>
-            </a:fontRef>
-          </p:style>
-          <p:txBody>
-            <a:bodyPr rtlCol="0" anchor="ctr"/>
-            <a:lstStyle/>
-            <a:p>
-              <a:pPr algn="ctr"/>
-              <a:endParaRPr lang="zh-TW" altLang="en-US"/>
-            </a:p>
-          </p:txBody>
-        </p:sp>
-        <p:sp>
-          <p:nvSpPr>
-            <p:cNvPr id="22" name="橢圓 21">
-              <a:extLst>
-                <a:ext uri="{FF2B5EF4-FFF2-40B4-BE49-F238E27FC236}">
-                  <a16:creationId xmlns:a16="http://schemas.microsoft.com/office/drawing/2014/main" id="{12B6EB9D-844C-45FE-B4A4-CAB355838C20}"/>
-                </a:ext>
-              </a:extLst>
-            </p:cNvPr>
-            <p:cNvSpPr/>
-            <p:nvPr/>
-          </p:nvSpPr>
-          <p:spPr>
-            <a:xfrm>
-              <a:off x="7697160" y="2137418"/>
-              <a:ext cx="173669" cy="173664"/>
-            </a:xfrm>
-            <a:prstGeom prst="ellipse">
-              <a:avLst/>
-            </a:prstGeom>
-            <a:solidFill>
-              <a:srgbClr val="AAEEFF"/>
-            </a:solidFill>
-            <a:ln w="6350">
-              <a:solidFill>
-                <a:schemeClr val="tx1"/>
-              </a:solidFill>
-            </a:ln>
-          </p:spPr>
-          <p:style>
-            <a:lnRef idx="2">
-              <a:schemeClr val="dk1">
-                <a:shade val="50000"/>
-              </a:schemeClr>
-            </a:lnRef>
-            <a:fillRef idx="1">
-              <a:schemeClr val="dk1"/>
-            </a:fillRef>
-            <a:effectRef idx="0">
-              <a:schemeClr val="dk1"/>
-            </a:effectRef>
-            <a:fontRef idx="minor">
-              <a:schemeClr val="lt1"/>
-            </a:fontRef>
-          </p:style>
-          <p:txBody>
-            <a:bodyPr rtlCol="0" anchor="ctr"/>
-            <a:lstStyle/>
-            <a:p>
-              <a:pPr algn="ctr"/>
-              <a:endParaRPr lang="zh-TW" altLang="en-US" dirty="0"/>
-            </a:p>
-          </p:txBody>
-        </p:sp>
-        <p:sp>
-          <p:nvSpPr>
-            <p:cNvPr id="23" name="橢圓 22">
-              <a:extLst>
-                <a:ext uri="{FF2B5EF4-FFF2-40B4-BE49-F238E27FC236}">
-                  <a16:creationId xmlns:a16="http://schemas.microsoft.com/office/drawing/2014/main" id="{EE106ADB-6579-498F-8EC8-A6BAC8638684}"/>
-                </a:ext>
-              </a:extLst>
-            </p:cNvPr>
-            <p:cNvSpPr/>
-            <p:nvPr/>
-          </p:nvSpPr>
-          <p:spPr>
-            <a:xfrm>
-              <a:off x="8263549" y="2137418"/>
-              <a:ext cx="173669" cy="173664"/>
-            </a:xfrm>
-            <a:prstGeom prst="ellipse">
-              <a:avLst/>
-            </a:prstGeom>
-            <a:solidFill>
-              <a:srgbClr val="AAEEFF"/>
-            </a:solidFill>
-            <a:ln w="6350">
-              <a:solidFill>
-                <a:schemeClr val="tx1"/>
-              </a:solidFill>
-            </a:ln>
-          </p:spPr>
-          <p:style>
-            <a:lnRef idx="2">
-              <a:schemeClr val="dk1">
-                <a:shade val="50000"/>
-              </a:schemeClr>
-            </a:lnRef>
-            <a:fillRef idx="1">
-              <a:schemeClr val="dk1"/>
-            </a:fillRef>
-            <a:effectRef idx="0">
-              <a:schemeClr val="dk1"/>
-            </a:effectRef>
-            <a:fontRef idx="minor">
-              <a:schemeClr val="lt1"/>
-            </a:fontRef>
-          </p:style>
-          <p:txBody>
-            <a:bodyPr rtlCol="0" anchor="ctr"/>
-            <a:lstStyle/>
-            <a:p>
-              <a:pPr algn="ctr"/>
-              <a:endParaRPr lang="zh-TW" altLang="en-US"/>
-            </a:p>
-          </p:txBody>
-        </p:sp>
-        <p:sp>
-          <p:nvSpPr>
-            <p:cNvPr id="24" name="橢圓 23">
-              <a:extLst>
-                <a:ext uri="{FF2B5EF4-FFF2-40B4-BE49-F238E27FC236}">
-                  <a16:creationId xmlns:a16="http://schemas.microsoft.com/office/drawing/2014/main" id="{8171FD58-75EF-4568-9740-D2EA00541817}"/>
-                </a:ext>
-              </a:extLst>
-            </p:cNvPr>
-            <p:cNvSpPr/>
-            <p:nvPr/>
-          </p:nvSpPr>
-          <p:spPr>
-            <a:xfrm>
-              <a:off x="6817153" y="2642955"/>
-              <a:ext cx="173669" cy="173664"/>
-            </a:xfrm>
-            <a:prstGeom prst="ellipse">
-              <a:avLst/>
-            </a:prstGeom>
-            <a:solidFill>
-              <a:srgbClr val="AAEEFF"/>
-            </a:solidFill>
-            <a:ln w="6350">
-              <a:solidFill>
-                <a:schemeClr val="tx1"/>
-              </a:solidFill>
-            </a:ln>
-          </p:spPr>
-          <p:style>
-            <a:lnRef idx="2">
-              <a:schemeClr val="dk1">
-                <a:shade val="50000"/>
-              </a:schemeClr>
-            </a:lnRef>
-            <a:fillRef idx="1">
-              <a:schemeClr val="dk1"/>
-            </a:fillRef>
-            <a:effectRef idx="0">
-              <a:schemeClr val="dk1"/>
-            </a:effectRef>
-            <a:fontRef idx="minor">
-              <a:schemeClr val="lt1"/>
-            </a:fontRef>
-          </p:style>
-          <p:txBody>
-            <a:bodyPr rtlCol="0" anchor="ctr"/>
-            <a:lstStyle/>
-            <a:p>
-              <a:pPr algn="ctr"/>
-              <a:endParaRPr lang="zh-TW" altLang="en-US"/>
-            </a:p>
-          </p:txBody>
-        </p:sp>
-        <p:sp>
-          <p:nvSpPr>
-            <p:cNvPr id="25" name="橢圓 24">
-              <a:extLst>
-                <a:ext uri="{FF2B5EF4-FFF2-40B4-BE49-F238E27FC236}">
-                  <a16:creationId xmlns:a16="http://schemas.microsoft.com/office/drawing/2014/main" id="{D619EBBE-5DE8-4D68-8DD2-B2B113818756}"/>
-                </a:ext>
-              </a:extLst>
-            </p:cNvPr>
-            <p:cNvSpPr/>
-            <p:nvPr/>
-          </p:nvSpPr>
-          <p:spPr>
-            <a:xfrm>
-              <a:off x="7404993" y="2642955"/>
-              <a:ext cx="173669" cy="173664"/>
-            </a:xfrm>
-            <a:prstGeom prst="ellipse">
-              <a:avLst/>
-            </a:prstGeom>
-            <a:solidFill>
-              <a:srgbClr val="AAEEFF"/>
-            </a:solidFill>
-            <a:ln w="6350">
-              <a:solidFill>
-                <a:schemeClr val="tx1"/>
-              </a:solidFill>
-            </a:ln>
-          </p:spPr>
-          <p:style>
-            <a:lnRef idx="2">
-              <a:schemeClr val="dk1">
-                <a:shade val="50000"/>
-              </a:schemeClr>
-            </a:lnRef>
-            <a:fillRef idx="1">
-              <a:schemeClr val="dk1"/>
-            </a:fillRef>
-            <a:effectRef idx="0">
-              <a:schemeClr val="dk1"/>
-            </a:effectRef>
-            <a:fontRef idx="minor">
-              <a:schemeClr val="lt1"/>
-            </a:fontRef>
-          </p:style>
-          <p:txBody>
-            <a:bodyPr rtlCol="0" anchor="ctr"/>
-            <a:lstStyle/>
-            <a:p>
-              <a:pPr algn="ctr"/>
-              <a:endParaRPr lang="zh-TW" altLang="en-US"/>
-            </a:p>
-          </p:txBody>
-        </p:sp>
-        <p:sp>
-          <p:nvSpPr>
-            <p:cNvPr id="26" name="橢圓 25">
-              <a:extLst>
-                <a:ext uri="{FF2B5EF4-FFF2-40B4-BE49-F238E27FC236}">
-                  <a16:creationId xmlns:a16="http://schemas.microsoft.com/office/drawing/2014/main" id="{DFE5A13F-8DE8-4952-A495-5BE2D171C6EF}"/>
-                </a:ext>
-              </a:extLst>
-            </p:cNvPr>
-            <p:cNvSpPr/>
-            <p:nvPr/>
-          </p:nvSpPr>
-          <p:spPr>
-            <a:xfrm>
-              <a:off x="7697160" y="1138827"/>
-              <a:ext cx="173669" cy="173664"/>
-            </a:xfrm>
-            <a:prstGeom prst="ellipse">
-              <a:avLst/>
-            </a:prstGeom>
-            <a:solidFill>
-              <a:srgbClr val="AAEEFF"/>
-            </a:solidFill>
-            <a:ln w="6350">
-              <a:solidFill>
-                <a:schemeClr val="tx1"/>
-              </a:solidFill>
-            </a:ln>
-          </p:spPr>
-          <p:style>
-            <a:lnRef idx="2">
-              <a:schemeClr val="dk1">
-                <a:shade val="50000"/>
-              </a:schemeClr>
-            </a:lnRef>
-            <a:fillRef idx="1">
-              <a:schemeClr val="dk1"/>
-            </a:fillRef>
-            <a:effectRef idx="0">
-              <a:schemeClr val="dk1"/>
-            </a:effectRef>
-            <a:fontRef idx="minor">
-              <a:schemeClr val="lt1"/>
-            </a:fontRef>
-          </p:style>
-          <p:txBody>
-            <a:bodyPr rtlCol="0" anchor="ctr"/>
-            <a:lstStyle/>
-            <a:p>
-              <a:pPr algn="ctr"/>
-              <a:endParaRPr lang="zh-TW" altLang="en-US"/>
-            </a:p>
-          </p:txBody>
-        </p:sp>
-        <p:sp>
-          <p:nvSpPr>
-            <p:cNvPr id="27" name="橢圓 26">
-              <a:extLst>
-                <a:ext uri="{FF2B5EF4-FFF2-40B4-BE49-F238E27FC236}">
-                  <a16:creationId xmlns:a16="http://schemas.microsoft.com/office/drawing/2014/main" id="{F247B4BA-93BB-4874-8D9C-078F61DCF66D}"/>
-                </a:ext>
-              </a:extLst>
-            </p:cNvPr>
-            <p:cNvSpPr/>
-            <p:nvPr/>
-          </p:nvSpPr>
-          <p:spPr>
-            <a:xfrm>
-              <a:off x="8263549" y="1138827"/>
-              <a:ext cx="173669" cy="173664"/>
-            </a:xfrm>
-            <a:prstGeom prst="ellipse">
-              <a:avLst/>
-            </a:prstGeom>
-            <a:solidFill>
-              <a:srgbClr val="AAEEFF"/>
-            </a:solidFill>
-            <a:ln w="6350">
-              <a:solidFill>
-                <a:schemeClr val="tx1"/>
-              </a:solidFill>
-            </a:ln>
-          </p:spPr>
-          <p:style>
-            <a:lnRef idx="2">
-              <a:schemeClr val="dk1">
-                <a:shade val="50000"/>
-              </a:schemeClr>
-            </a:lnRef>
-            <a:fillRef idx="1">
-              <a:schemeClr val="dk1"/>
-            </a:fillRef>
-            <a:effectRef idx="0">
-              <a:schemeClr val="dk1"/>
-            </a:effectRef>
-            <a:fontRef idx="minor">
-              <a:schemeClr val="lt1"/>
-            </a:fontRef>
-          </p:style>
-          <p:txBody>
-            <a:bodyPr rtlCol="0" anchor="ctr"/>
-            <a:lstStyle/>
-            <a:p>
-              <a:pPr algn="ctr"/>
-              <a:endParaRPr lang="zh-TW" altLang="en-US"/>
-            </a:p>
-          </p:txBody>
-        </p:sp>
-        <p:sp>
-          <p:nvSpPr>
-            <p:cNvPr id="28" name="橢圓 27">
-              <a:extLst>
-                <a:ext uri="{FF2B5EF4-FFF2-40B4-BE49-F238E27FC236}">
-                  <a16:creationId xmlns:a16="http://schemas.microsoft.com/office/drawing/2014/main" id="{1B6190AB-051F-4F48-8761-E18EBC54ACB1}"/>
-                </a:ext>
-              </a:extLst>
-            </p:cNvPr>
-            <p:cNvSpPr/>
-            <p:nvPr/>
-          </p:nvSpPr>
-          <p:spPr>
-            <a:xfrm>
-              <a:off x="8552983" y="1644560"/>
-              <a:ext cx="173669" cy="173664"/>
-            </a:xfrm>
-            <a:prstGeom prst="ellipse">
-              <a:avLst/>
-            </a:prstGeom>
-            <a:solidFill>
-              <a:srgbClr val="AAEEFF"/>
-            </a:solidFill>
-            <a:ln w="6350">
-              <a:solidFill>
-                <a:schemeClr val="tx1"/>
-              </a:solidFill>
-            </a:ln>
-          </p:spPr>
-          <p:style>
-            <a:lnRef idx="2">
-              <a:schemeClr val="dk1">
-                <a:shade val="50000"/>
-              </a:schemeClr>
-            </a:lnRef>
-            <a:fillRef idx="1">
-              <a:schemeClr val="dk1"/>
-            </a:fillRef>
-            <a:effectRef idx="0">
-              <a:schemeClr val="dk1"/>
-            </a:effectRef>
-            <a:fontRef idx="minor">
-              <a:schemeClr val="lt1"/>
-            </a:fontRef>
-          </p:style>
-          <p:txBody>
-            <a:bodyPr rtlCol="0" anchor="ctr"/>
-            <a:lstStyle/>
-            <a:p>
-              <a:pPr algn="ctr"/>
-              <a:endParaRPr lang="zh-TW" altLang="en-US"/>
-            </a:p>
-          </p:txBody>
-        </p:sp>
-        <p:sp>
-          <p:nvSpPr>
-            <p:cNvPr id="29" name="橢圓 28">
-              <a:extLst>
-                <a:ext uri="{FF2B5EF4-FFF2-40B4-BE49-F238E27FC236}">
-                  <a16:creationId xmlns:a16="http://schemas.microsoft.com/office/drawing/2014/main" id="{EA8A417B-375B-4A2F-A59B-2FBEE43962C1}"/>
-                </a:ext>
-              </a:extLst>
-            </p:cNvPr>
-            <p:cNvSpPr/>
-            <p:nvPr/>
-          </p:nvSpPr>
-          <p:spPr>
-            <a:xfrm>
-              <a:off x="6817153" y="644994"/>
-              <a:ext cx="173669" cy="173664"/>
-            </a:xfrm>
-            <a:prstGeom prst="ellipse">
-              <a:avLst/>
-            </a:prstGeom>
-            <a:solidFill>
-              <a:srgbClr val="AAEEFF"/>
-            </a:solidFill>
-            <a:ln w="6350">
-              <a:solidFill>
-                <a:schemeClr val="tx1"/>
-              </a:solidFill>
-            </a:ln>
-          </p:spPr>
-          <p:style>
-            <a:lnRef idx="2">
-              <a:schemeClr val="dk1">
-                <a:shade val="50000"/>
-              </a:schemeClr>
-            </a:lnRef>
-            <a:fillRef idx="1">
-              <a:schemeClr val="dk1"/>
-            </a:fillRef>
-            <a:effectRef idx="0">
-              <a:schemeClr val="dk1"/>
-            </a:effectRef>
-            <a:fontRef idx="minor">
-              <a:schemeClr val="lt1"/>
-            </a:fontRef>
-          </p:style>
-          <p:txBody>
-            <a:bodyPr rtlCol="0" anchor="ctr"/>
-            <a:lstStyle/>
-            <a:p>
-              <a:pPr algn="ctr"/>
-              <a:endParaRPr lang="zh-TW" altLang="en-US"/>
-            </a:p>
-          </p:txBody>
-        </p:sp>
-        <p:sp>
-          <p:nvSpPr>
-            <p:cNvPr id="30" name="橢圓 29">
-              <a:extLst>
-                <a:ext uri="{FF2B5EF4-FFF2-40B4-BE49-F238E27FC236}">
-                  <a16:creationId xmlns:a16="http://schemas.microsoft.com/office/drawing/2014/main" id="{4ECA625E-33D8-4015-96EF-1CE4CDC096B3}"/>
-                </a:ext>
-              </a:extLst>
-            </p:cNvPr>
-            <p:cNvSpPr/>
-            <p:nvPr/>
-          </p:nvSpPr>
-          <p:spPr>
-            <a:xfrm>
-              <a:off x="7404993" y="644994"/>
-              <a:ext cx="173669" cy="173664"/>
-            </a:xfrm>
-            <a:prstGeom prst="ellipse">
-              <a:avLst/>
-            </a:prstGeom>
-            <a:solidFill>
-              <a:srgbClr val="AAEEFF"/>
-            </a:solidFill>
-            <a:ln w="6350">
-              <a:solidFill>
-                <a:schemeClr val="tx1"/>
-              </a:solidFill>
-            </a:ln>
-          </p:spPr>
-          <p:style>
-            <a:lnRef idx="2">
-              <a:schemeClr val="dk1">
-                <a:shade val="50000"/>
-              </a:schemeClr>
-            </a:lnRef>
-            <a:fillRef idx="1">
-              <a:schemeClr val="dk1"/>
-            </a:fillRef>
-            <a:effectRef idx="0">
-              <a:schemeClr val="dk1"/>
-            </a:effectRef>
-            <a:fontRef idx="minor">
-              <a:schemeClr val="lt1"/>
-            </a:fontRef>
-          </p:style>
-          <p:txBody>
-            <a:bodyPr rtlCol="0" anchor="ctr"/>
-            <a:lstStyle/>
-            <a:p>
-              <a:pPr algn="ctr"/>
-              <a:endParaRPr lang="zh-TW" altLang="en-US"/>
-            </a:p>
-          </p:txBody>
-        </p:sp>
-        <p:sp>
-          <p:nvSpPr>
-            <p:cNvPr id="31" name="橢圓 30">
-              <a:extLst>
-                <a:ext uri="{FF2B5EF4-FFF2-40B4-BE49-F238E27FC236}">
-                  <a16:creationId xmlns:a16="http://schemas.microsoft.com/office/drawing/2014/main" id="{5BCA3EA5-51EA-41DA-92C9-8A0931B4D48D}"/>
-                </a:ext>
-              </a:extLst>
-            </p:cNvPr>
-            <p:cNvSpPr/>
-            <p:nvPr/>
-          </p:nvSpPr>
-          <p:spPr>
-            <a:xfrm>
-              <a:off x="6537723" y="2137418"/>
-              <a:ext cx="173669" cy="173664"/>
-            </a:xfrm>
-            <a:prstGeom prst="ellipse">
-              <a:avLst/>
-            </a:prstGeom>
-            <a:solidFill>
-              <a:srgbClr val="AAEEFF"/>
-            </a:solidFill>
-            <a:ln w="6350">
-              <a:solidFill>
-                <a:schemeClr val="tx1"/>
-              </a:solidFill>
-            </a:ln>
-          </p:spPr>
-          <p:style>
-            <a:lnRef idx="2">
-              <a:schemeClr val="dk1">
-                <a:shade val="50000"/>
-              </a:schemeClr>
-            </a:lnRef>
-            <a:fillRef idx="1">
-              <a:schemeClr val="dk1"/>
-            </a:fillRef>
-            <a:effectRef idx="0">
-              <a:schemeClr val="dk1"/>
-            </a:effectRef>
-            <a:fontRef idx="minor">
-              <a:schemeClr val="lt1"/>
-            </a:fontRef>
-          </p:style>
-          <p:txBody>
-            <a:bodyPr rtlCol="0" anchor="ctr"/>
-            <a:lstStyle/>
-            <a:p>
-              <a:pPr algn="ctr"/>
-              <a:endParaRPr lang="zh-TW" altLang="en-US"/>
-            </a:p>
-          </p:txBody>
-        </p:sp>
-        <p:sp>
-          <p:nvSpPr>
-            <p:cNvPr id="32" name="橢圓 31">
-              <a:extLst>
-                <a:ext uri="{FF2B5EF4-FFF2-40B4-BE49-F238E27FC236}">
-                  <a16:creationId xmlns:a16="http://schemas.microsoft.com/office/drawing/2014/main" id="{CCD120D3-65A9-46E9-AEB4-97286592E209}"/>
-                </a:ext>
-              </a:extLst>
-            </p:cNvPr>
-            <p:cNvSpPr/>
-            <p:nvPr/>
-          </p:nvSpPr>
-          <p:spPr>
-            <a:xfrm>
-              <a:off x="6537723" y="1138827"/>
-              <a:ext cx="173669" cy="173664"/>
-            </a:xfrm>
-            <a:prstGeom prst="ellipse">
-              <a:avLst/>
-            </a:prstGeom>
-            <a:solidFill>
-              <a:srgbClr val="AAEEFF"/>
-            </a:solidFill>
-            <a:ln w="6350">
-              <a:solidFill>
-                <a:schemeClr val="tx1"/>
-              </a:solidFill>
-            </a:ln>
-          </p:spPr>
-          <p:style>
-            <a:lnRef idx="2">
-              <a:schemeClr val="dk1">
-                <a:shade val="50000"/>
-              </a:schemeClr>
-            </a:lnRef>
-            <a:fillRef idx="1">
-              <a:schemeClr val="dk1"/>
-            </a:fillRef>
-            <a:effectRef idx="0">
-              <a:schemeClr val="dk1"/>
-            </a:effectRef>
-            <a:fontRef idx="minor">
-              <a:schemeClr val="lt1"/>
-            </a:fontRef>
-          </p:style>
-          <p:txBody>
-            <a:bodyPr rtlCol="0" anchor="ctr"/>
-            <a:lstStyle/>
-            <a:p>
-              <a:pPr algn="ctr"/>
-              <a:endParaRPr lang="zh-TW" altLang="en-US"/>
-            </a:p>
-          </p:txBody>
-        </p:sp>
-        <p:sp>
-          <p:nvSpPr>
-            <p:cNvPr id="16" name="六邊形 15">
-              <a:extLst>
-                <a:ext uri="{FF2B5EF4-FFF2-40B4-BE49-F238E27FC236}">
-                  <a16:creationId xmlns:a16="http://schemas.microsoft.com/office/drawing/2014/main" id="{0A40C1E8-DC9A-419F-AD3D-45C2294D9BB1}"/>
-                </a:ext>
-              </a:extLst>
-            </p:cNvPr>
-            <p:cNvSpPr/>
-            <p:nvPr/>
-          </p:nvSpPr>
-          <p:spPr>
-            <a:xfrm rot="1800000">
-              <a:off x="9112672" y="1090531"/>
-              <a:ext cx="1483948" cy="1279163"/>
+              <a:off x="3601272" y="3280006"/>
+              <a:ext cx="1185317" cy="1021743"/>
             </a:xfrm>
             <a:prstGeom prst="hexagon">
               <a:avLst>
@@ -6327,12 +5433,12 @@
                 <a:gd name="vf" fmla="val 115470"/>
               </a:avLst>
             </a:prstGeom>
-            <a:solidFill>
-              <a:schemeClr val="bg1"/>
-            </a:solidFill>
+            <a:grpFill/>
             <a:ln>
               <a:solidFill>
-                <a:schemeClr val="tx1"/>
+                <a:schemeClr val="bg1">
+                  <a:lumMod val="50000"/>
+                </a:schemeClr>
               </a:solidFill>
             </a:ln>
           </p:spPr>
@@ -6361,980 +5467,12 @@
             </a:p>
           </p:txBody>
         </p:sp>
-        <p:cxnSp>
-          <p:nvCxnSpPr>
-            <p:cNvPr id="17" name="直線單箭頭接點 16">
+        <p:sp>
+          <p:nvSpPr>
+            <p:cNvPr id="34" name="六邊形 33">
               <a:extLst>
                 <a:ext uri="{FF2B5EF4-FFF2-40B4-BE49-F238E27FC236}">
-                  <a16:creationId xmlns:a16="http://schemas.microsoft.com/office/drawing/2014/main" id="{E4CBEF06-A237-42F4-AD45-CDA3D24F9149}"/>
-                </a:ext>
-              </a:extLst>
-            </p:cNvPr>
-            <p:cNvCxnSpPr>
-              <a:cxnSpLocks/>
-            </p:cNvCxnSpPr>
-            <p:nvPr/>
-          </p:nvCxnSpPr>
-          <p:spPr>
-            <a:xfrm>
-              <a:off x="9744568" y="1730112"/>
-              <a:ext cx="468000" cy="0"/>
-            </a:xfrm>
-            <a:prstGeom prst="straightConnector1">
-              <a:avLst/>
-            </a:prstGeom>
-            <a:solidFill>
-              <a:schemeClr val="bg1"/>
-            </a:solidFill>
-            <a:ln>
-              <a:tailEnd type="triangle"/>
-            </a:ln>
-          </p:spPr>
-          <p:style>
-            <a:lnRef idx="2">
-              <a:schemeClr val="dk1"/>
-            </a:lnRef>
-            <a:fillRef idx="0">
-              <a:schemeClr val="dk1"/>
-            </a:fillRef>
-            <a:effectRef idx="1">
-              <a:schemeClr val="dk1"/>
-            </a:effectRef>
-            <a:fontRef idx="minor">
-              <a:schemeClr val="tx1"/>
-            </a:fontRef>
-          </p:style>
-        </p:cxnSp>
-        <p:cxnSp>
-          <p:nvCxnSpPr>
-            <p:cNvPr id="18" name="直線單箭頭接點 17">
-              <a:extLst>
-                <a:ext uri="{FF2B5EF4-FFF2-40B4-BE49-F238E27FC236}">
-                  <a16:creationId xmlns:a16="http://schemas.microsoft.com/office/drawing/2014/main" id="{5F6D1846-0138-4BAD-930E-83CDBC515EE7}"/>
-                </a:ext>
-              </a:extLst>
-            </p:cNvPr>
-            <p:cNvCxnSpPr>
-              <a:cxnSpLocks/>
-            </p:cNvCxnSpPr>
-            <p:nvPr/>
-          </p:nvCxnSpPr>
-          <p:spPr>
-            <a:xfrm flipV="1">
-              <a:off x="9854646" y="1380856"/>
-              <a:ext cx="0" cy="468000"/>
-            </a:xfrm>
-            <a:prstGeom prst="straightConnector1">
-              <a:avLst/>
-            </a:prstGeom>
-            <a:solidFill>
-              <a:schemeClr val="bg1"/>
-            </a:solidFill>
-            <a:ln>
-              <a:tailEnd type="triangle"/>
-            </a:ln>
-          </p:spPr>
-          <p:style>
-            <a:lnRef idx="2">
-              <a:schemeClr val="dk1"/>
-            </a:lnRef>
-            <a:fillRef idx="0">
-              <a:schemeClr val="dk1"/>
-            </a:fillRef>
-            <a:effectRef idx="1">
-              <a:schemeClr val="dk1"/>
-            </a:effectRef>
-            <a:fontRef idx="minor">
-              <a:schemeClr val="tx1"/>
-            </a:fontRef>
-          </p:style>
-        </p:cxnSp>
-        <mc:AlternateContent xmlns:mc="http://schemas.openxmlformats.org/markup-compatibility/2006">
-          <mc:Choice xmlns:a14="http://schemas.microsoft.com/office/drawing/2010/main" Requires="a14">
-            <p:sp>
-              <p:nvSpPr>
-                <p:cNvPr id="13" name="文字方塊 12">
-                  <a:extLst>
-                    <a:ext uri="{FF2B5EF4-FFF2-40B4-BE49-F238E27FC236}">
-                      <a16:creationId xmlns:a16="http://schemas.microsoft.com/office/drawing/2014/main" id="{24881DEE-6CE7-4CE6-BD26-BA2D1F5F5087}"/>
-                    </a:ext>
-                  </a:extLst>
-                </p:cNvPr>
-                <p:cNvSpPr txBox="1"/>
-                <p:nvPr/>
-              </p:nvSpPr>
-              <p:spPr>
-                <a:xfrm>
-                  <a:off x="10093919" y="1540411"/>
-                  <a:ext cx="500693" cy="462382"/>
-                </a:xfrm>
-                <a:prstGeom prst="rect">
-                  <a:avLst/>
-                </a:prstGeom>
-                <a:noFill/>
-              </p:spPr>
-              <p:txBody>
-                <a:bodyPr wrap="square" rtlCol="0">
-                  <a:spAutoFit/>
-                </a:bodyPr>
-                <a:lstStyle/>
-                <a:p>
-                  <a:pPr/>
-                  <a14:m>
-                    <m:oMathPara xmlns:m="http://schemas.openxmlformats.org/officeDocument/2006/math">
-                      <m:oMathParaPr>
-                        <m:jc m:val="centerGroup"/>
-                      </m:oMathParaPr>
-                      <m:oMath xmlns:m="http://schemas.openxmlformats.org/officeDocument/2006/math">
-                        <m:sSub>
-                          <m:sSubPr>
-                            <m:ctrlPr>
-                              <a:rPr lang="en-US" altLang="zh-TW" b="0" i="1" smtClean="0">
-                                <a:latin typeface="Cambria Math" panose="02040503050406030204" pitchFamily="18" charset="0"/>
-                              </a:rPr>
-                            </m:ctrlPr>
-                          </m:sSubPr>
-                          <m:e>
-                            <m:r>
-                              <a:rPr lang="en-US" altLang="zh-TW" b="0" i="1" smtClean="0">
-                                <a:latin typeface="Cambria Math" panose="02040503050406030204" pitchFamily="18" charset="0"/>
-                              </a:rPr>
-                              <m:t>𝑘</m:t>
-                            </m:r>
-                          </m:e>
-                          <m:sub>
-                            <m:r>
-                              <a:rPr lang="en-US" altLang="zh-TW" b="0" i="1" smtClean="0">
-                                <a:latin typeface="Cambria Math" panose="02040503050406030204" pitchFamily="18" charset="0"/>
-                              </a:rPr>
-                              <m:t>𝑥</m:t>
-                            </m:r>
-                          </m:sub>
-                        </m:sSub>
-                      </m:oMath>
-                    </m:oMathPara>
-                  </a14:m>
-                  <a:endParaRPr lang="zh-TW" altLang="en-US" dirty="0"/>
-                </a:p>
-              </p:txBody>
-            </p:sp>
-          </mc:Choice>
-          <mc:Fallback>
-            <p:sp>
-              <p:nvSpPr>
-                <p:cNvPr id="13" name="文字方塊 12">
-                  <a:extLst>
-                    <a:ext uri="{FF2B5EF4-FFF2-40B4-BE49-F238E27FC236}">
-                      <a16:creationId xmlns:a16="http://schemas.microsoft.com/office/drawing/2014/main" id="{24881DEE-6CE7-4CE6-BD26-BA2D1F5F5087}"/>
-                    </a:ext>
-                  </a:extLst>
-                </p:cNvPr>
-                <p:cNvSpPr txBox="1">
-                  <a:spLocks noRot="1" noChangeAspect="1" noMove="1" noResize="1" noEditPoints="1" noAdjustHandles="1" noChangeArrowheads="1" noChangeShapeType="1" noTextEdit="1"/>
-                </p:cNvSpPr>
-                <p:nvPr/>
-              </p:nvSpPr>
-              <p:spPr>
-                <a:xfrm>
-                  <a:off x="10093919" y="1540411"/>
-                  <a:ext cx="500693" cy="462382"/>
-                </a:xfrm>
-                <a:prstGeom prst="rect">
-                  <a:avLst/>
-                </a:prstGeom>
-                <a:blipFill>
-                  <a:blip r:embed="rId3"/>
-                  <a:stretch>
-                    <a:fillRect/>
-                  </a:stretch>
-                </a:blipFill>
-              </p:spPr>
-              <p:txBody>
-                <a:bodyPr/>
-                <a:lstStyle/>
-                <a:p>
-                  <a:r>
-                    <a:rPr lang="zh-TW" altLang="en-US">
-                      <a:noFill/>
-                    </a:rPr>
-                    <a:t> </a:t>
-                  </a:r>
-                </a:p>
-              </p:txBody>
-            </p:sp>
-          </mc:Fallback>
-        </mc:AlternateContent>
-        <mc:AlternateContent xmlns:mc="http://schemas.openxmlformats.org/markup-compatibility/2006">
-          <mc:Choice xmlns:a14="http://schemas.microsoft.com/office/drawing/2010/main" Requires="a14">
-            <p:sp>
-              <p:nvSpPr>
-                <p:cNvPr id="14" name="文字方塊 13">
-                  <a:extLst>
-                    <a:ext uri="{FF2B5EF4-FFF2-40B4-BE49-F238E27FC236}">
-                      <a16:creationId xmlns:a16="http://schemas.microsoft.com/office/drawing/2014/main" id="{1B07889F-0CF2-4623-B113-F4E0CA26EBA2}"/>
-                    </a:ext>
-                  </a:extLst>
-                </p:cNvPr>
-                <p:cNvSpPr txBox="1"/>
-                <p:nvPr/>
-              </p:nvSpPr>
-              <p:spPr>
-                <a:xfrm>
-                  <a:off x="9653978" y="1034133"/>
-                  <a:ext cx="500693" cy="489836"/>
-                </a:xfrm>
-                <a:prstGeom prst="rect">
-                  <a:avLst/>
-                </a:prstGeom>
-                <a:noFill/>
-              </p:spPr>
-              <p:txBody>
-                <a:bodyPr wrap="square" rtlCol="0">
-                  <a:spAutoFit/>
-                </a:bodyPr>
-                <a:lstStyle/>
-                <a:p>
-                  <a:pPr/>
-                  <a14:m>
-                    <m:oMathPara xmlns:m="http://schemas.openxmlformats.org/officeDocument/2006/math">
-                      <m:oMathParaPr>
-                        <m:jc m:val="centerGroup"/>
-                      </m:oMathParaPr>
-                      <m:oMath xmlns:m="http://schemas.openxmlformats.org/officeDocument/2006/math">
-                        <m:sSub>
-                          <m:sSubPr>
-                            <m:ctrlPr>
-                              <a:rPr lang="en-US" altLang="zh-TW" b="0" i="1" smtClean="0">
-                                <a:latin typeface="Cambria Math" panose="02040503050406030204" pitchFamily="18" charset="0"/>
-                              </a:rPr>
-                            </m:ctrlPr>
-                          </m:sSubPr>
-                          <m:e>
-                            <m:r>
-                              <a:rPr lang="en-US" altLang="zh-TW" b="0" i="1" smtClean="0">
-                                <a:latin typeface="Cambria Math" panose="02040503050406030204" pitchFamily="18" charset="0"/>
-                              </a:rPr>
-                              <m:t>𝑘</m:t>
-                            </m:r>
-                          </m:e>
-                          <m:sub>
-                            <m:r>
-                              <a:rPr lang="en-US" altLang="zh-TW" b="0" i="1" smtClean="0">
-                                <a:latin typeface="Cambria Math" panose="02040503050406030204" pitchFamily="18" charset="0"/>
-                              </a:rPr>
-                              <m:t>𝑦</m:t>
-                            </m:r>
-                          </m:sub>
-                        </m:sSub>
-                      </m:oMath>
-                    </m:oMathPara>
-                  </a14:m>
-                  <a:endParaRPr lang="zh-TW" altLang="en-US" dirty="0"/>
-                </a:p>
-              </p:txBody>
-            </p:sp>
-          </mc:Choice>
-          <mc:Fallback>
-            <p:sp>
-              <p:nvSpPr>
-                <p:cNvPr id="14" name="文字方塊 13">
-                  <a:extLst>
-                    <a:ext uri="{FF2B5EF4-FFF2-40B4-BE49-F238E27FC236}">
-                      <a16:creationId xmlns:a16="http://schemas.microsoft.com/office/drawing/2014/main" id="{1B07889F-0CF2-4623-B113-F4E0CA26EBA2}"/>
-                    </a:ext>
-                  </a:extLst>
-                </p:cNvPr>
-                <p:cNvSpPr txBox="1">
-                  <a:spLocks noRot="1" noChangeAspect="1" noMove="1" noResize="1" noEditPoints="1" noAdjustHandles="1" noChangeArrowheads="1" noChangeShapeType="1" noTextEdit="1"/>
-                </p:cNvSpPr>
-                <p:nvPr/>
-              </p:nvSpPr>
-              <p:spPr>
-                <a:xfrm>
-                  <a:off x="9653978" y="1034133"/>
-                  <a:ext cx="500693" cy="489836"/>
-                </a:xfrm>
-                <a:prstGeom prst="rect">
-                  <a:avLst/>
-                </a:prstGeom>
-                <a:blipFill>
-                  <a:blip r:embed="rId4"/>
-                  <a:stretch>
-                    <a:fillRect/>
-                  </a:stretch>
-                </a:blipFill>
-              </p:spPr>
-              <p:txBody>
-                <a:bodyPr/>
-                <a:lstStyle/>
-                <a:p>
-                  <a:r>
-                    <a:rPr lang="zh-TW" altLang="en-US">
-                      <a:noFill/>
-                    </a:rPr>
-                    <a:t> </a:t>
-                  </a:r>
-                </a:p>
-              </p:txBody>
-            </p:sp>
-          </mc:Fallback>
-        </mc:AlternateContent>
-        <p:sp>
-          <p:nvSpPr>
-            <p:cNvPr id="9" name="文字方塊 8">
-              <a:extLst>
-                <a:ext uri="{FF2B5EF4-FFF2-40B4-BE49-F238E27FC236}">
-                  <a16:creationId xmlns:a16="http://schemas.microsoft.com/office/drawing/2014/main" id="{B0F1BF08-50B6-456D-AD43-4D20172C09AB}"/>
-                </a:ext>
-              </a:extLst>
-            </p:cNvPr>
-            <p:cNvSpPr txBox="1"/>
-            <p:nvPr/>
-          </p:nvSpPr>
-          <p:spPr>
-            <a:xfrm>
-              <a:off x="6131598" y="202721"/>
-              <a:ext cx="472614" cy="462382"/>
-            </a:xfrm>
-            <a:prstGeom prst="rect">
-              <a:avLst/>
-            </a:prstGeom>
-            <a:solidFill>
-              <a:schemeClr val="bg1"/>
-            </a:solidFill>
-          </p:spPr>
-          <p:txBody>
-            <a:bodyPr wrap="square" rtlCol="0">
-              <a:spAutoFit/>
-            </a:bodyPr>
-            <a:lstStyle/>
-            <a:p>
-              <a:r>
-                <a:rPr lang="en-US" altLang="zh-TW" dirty="0"/>
-                <a:t>(c)</a:t>
-              </a:r>
-              <a:endParaRPr lang="zh-TW" altLang="en-US" dirty="0"/>
-            </a:p>
-          </p:txBody>
-        </p:sp>
-        <p:sp>
-          <p:nvSpPr>
-            <p:cNvPr id="10" name="文字方塊 9">
-              <a:extLst>
-                <a:ext uri="{FF2B5EF4-FFF2-40B4-BE49-F238E27FC236}">
-                  <a16:creationId xmlns:a16="http://schemas.microsoft.com/office/drawing/2014/main" id="{537346B7-D3B8-4123-BE3E-B36E4536CF9F}"/>
-                </a:ext>
-              </a:extLst>
-            </p:cNvPr>
-            <p:cNvSpPr txBox="1"/>
-            <p:nvPr/>
-          </p:nvSpPr>
-          <p:spPr>
-            <a:xfrm>
-              <a:off x="6131598" y="3315080"/>
-              <a:ext cx="472614" cy="462382"/>
-            </a:xfrm>
-            <a:prstGeom prst="rect">
-              <a:avLst/>
-            </a:prstGeom>
-            <a:solidFill>
-              <a:schemeClr val="bg1"/>
-            </a:solidFill>
-          </p:spPr>
-          <p:txBody>
-            <a:bodyPr wrap="square" rtlCol="0">
-              <a:spAutoFit/>
-            </a:bodyPr>
-            <a:lstStyle/>
-            <a:p>
-              <a:r>
-                <a:rPr lang="en-US" altLang="zh-TW" dirty="0"/>
-                <a:t>(d)</a:t>
-              </a:r>
-              <a:endParaRPr lang="zh-TW" altLang="en-US" dirty="0"/>
-            </a:p>
-          </p:txBody>
-        </p:sp>
-        <mc:AlternateContent xmlns:mc="http://schemas.openxmlformats.org/markup-compatibility/2006">
-          <mc:Choice xmlns:a14="http://schemas.microsoft.com/office/drawing/2010/main" Requires="a14">
-            <p:sp>
-              <p:nvSpPr>
-                <p:cNvPr id="37" name="文字方塊 36">
-                  <a:extLst>
-                    <a:ext uri="{FF2B5EF4-FFF2-40B4-BE49-F238E27FC236}">
-                      <a16:creationId xmlns:a16="http://schemas.microsoft.com/office/drawing/2014/main" id="{473B1D4D-197E-454B-873E-F620A370BF47}"/>
-                    </a:ext>
-                  </a:extLst>
-                </p:cNvPr>
-                <p:cNvSpPr txBox="1"/>
-                <p:nvPr/>
-              </p:nvSpPr>
-              <p:spPr>
-                <a:xfrm>
-                  <a:off x="10369630" y="1096406"/>
-                  <a:ext cx="500693" cy="369332"/>
-                </a:xfrm>
-                <a:prstGeom prst="rect">
-                  <a:avLst/>
-                </a:prstGeom>
-                <a:noFill/>
-              </p:spPr>
-              <p:txBody>
-                <a:bodyPr wrap="square" rtlCol="0">
-                  <a:spAutoFit/>
-                </a:bodyPr>
-                <a:lstStyle/>
-                <a:p>
-                  <a:pPr/>
-                  <a14:m>
-                    <m:oMathPara xmlns:m="http://schemas.openxmlformats.org/officeDocument/2006/math">
-                      <m:oMathParaPr>
-                        <m:jc m:val="centerGroup"/>
-                      </m:oMathParaPr>
-                      <m:oMath xmlns:m="http://schemas.openxmlformats.org/officeDocument/2006/math">
-                        <m:r>
-                          <a:rPr lang="en-US" altLang="zh-TW" b="0" i="1" smtClean="0">
-                            <a:latin typeface="Cambria Math" panose="02040503050406030204" pitchFamily="18" charset="0"/>
-                          </a:rPr>
-                          <m:t>𝐾</m:t>
-                        </m:r>
-                      </m:oMath>
-                    </m:oMathPara>
-                  </a14:m>
-                  <a:endParaRPr lang="zh-TW" altLang="en-US" dirty="0"/>
-                </a:p>
-              </p:txBody>
-            </p:sp>
-          </mc:Choice>
-          <mc:Fallback>
-            <p:sp>
-              <p:nvSpPr>
-                <p:cNvPr id="37" name="文字方塊 36">
-                  <a:extLst>
-                    <a:ext uri="{FF2B5EF4-FFF2-40B4-BE49-F238E27FC236}">
-                      <a16:creationId xmlns:a16="http://schemas.microsoft.com/office/drawing/2014/main" id="{473B1D4D-197E-454B-873E-F620A370BF47}"/>
-                    </a:ext>
-                  </a:extLst>
-                </p:cNvPr>
-                <p:cNvSpPr txBox="1">
-                  <a:spLocks noRot="1" noChangeAspect="1" noMove="1" noResize="1" noEditPoints="1" noAdjustHandles="1" noChangeArrowheads="1" noChangeShapeType="1" noTextEdit="1"/>
-                </p:cNvSpPr>
-                <p:nvPr/>
-              </p:nvSpPr>
-              <p:spPr>
-                <a:xfrm>
-                  <a:off x="10369630" y="1096406"/>
-                  <a:ext cx="500693" cy="369332"/>
-                </a:xfrm>
-                <a:prstGeom prst="rect">
-                  <a:avLst/>
-                </a:prstGeom>
-                <a:blipFill>
-                  <a:blip r:embed="rId5"/>
-                  <a:stretch>
-                    <a:fillRect/>
-                  </a:stretch>
-                </a:blipFill>
-              </p:spPr>
-              <p:txBody>
-                <a:bodyPr/>
-                <a:lstStyle/>
-                <a:p>
-                  <a:r>
-                    <a:rPr lang="zh-TW" altLang="en-US">
-                      <a:noFill/>
-                    </a:rPr>
-                    <a:t> </a:t>
-                  </a:r>
-                </a:p>
-              </p:txBody>
-            </p:sp>
-          </mc:Fallback>
-        </mc:AlternateContent>
-        <mc:AlternateContent xmlns:mc="http://schemas.openxmlformats.org/markup-compatibility/2006">
-          <mc:Choice xmlns:a14="http://schemas.microsoft.com/office/drawing/2010/main" Requires="a14">
-            <p:sp>
-              <p:nvSpPr>
-                <p:cNvPr id="38" name="文字方塊 37">
-                  <a:extLst>
-                    <a:ext uri="{FF2B5EF4-FFF2-40B4-BE49-F238E27FC236}">
-                      <a16:creationId xmlns:a16="http://schemas.microsoft.com/office/drawing/2014/main" id="{E1EC01B3-2778-468E-99C2-C4F554E7F092}"/>
-                    </a:ext>
-                  </a:extLst>
-                </p:cNvPr>
-                <p:cNvSpPr txBox="1"/>
-                <p:nvPr/>
-              </p:nvSpPr>
-              <p:spPr>
-                <a:xfrm>
-                  <a:off x="9600010" y="630505"/>
-                  <a:ext cx="500693" cy="369332"/>
-                </a:xfrm>
-                <a:prstGeom prst="rect">
-                  <a:avLst/>
-                </a:prstGeom>
-                <a:noFill/>
-              </p:spPr>
-              <p:txBody>
-                <a:bodyPr wrap="square" rtlCol="0">
-                  <a:spAutoFit/>
-                </a:bodyPr>
-                <a:lstStyle/>
-                <a:p>
-                  <a:pPr/>
-                  <a14:m>
-                    <m:oMathPara xmlns:m="http://schemas.openxmlformats.org/officeDocument/2006/math">
-                      <m:oMathParaPr>
-                        <m:jc m:val="centerGroup"/>
-                      </m:oMathParaPr>
-                      <m:oMath xmlns:m="http://schemas.openxmlformats.org/officeDocument/2006/math">
-                        <m:r>
-                          <a:rPr lang="en-US" altLang="zh-TW" b="0" i="1" smtClean="0">
-                            <a:latin typeface="Cambria Math" panose="02040503050406030204" pitchFamily="18" charset="0"/>
-                          </a:rPr>
-                          <m:t>𝐾</m:t>
-                        </m:r>
-                        <m:r>
-                          <a:rPr lang="en-US" altLang="zh-TW" i="1" smtClean="0">
-                            <a:latin typeface="Cambria Math" panose="02040503050406030204" pitchFamily="18" charset="0"/>
-                          </a:rPr>
-                          <m:t>’</m:t>
-                        </m:r>
-                      </m:oMath>
-                    </m:oMathPara>
-                  </a14:m>
-                  <a:endParaRPr lang="zh-TW" altLang="en-US" dirty="0"/>
-                </a:p>
-              </p:txBody>
-            </p:sp>
-          </mc:Choice>
-          <mc:Fallback>
-            <p:sp>
-              <p:nvSpPr>
-                <p:cNvPr id="38" name="文字方塊 37">
-                  <a:extLst>
-                    <a:ext uri="{FF2B5EF4-FFF2-40B4-BE49-F238E27FC236}">
-                      <a16:creationId xmlns:a16="http://schemas.microsoft.com/office/drawing/2014/main" id="{E1EC01B3-2778-468E-99C2-C4F554E7F092}"/>
-                    </a:ext>
-                  </a:extLst>
-                </p:cNvPr>
-                <p:cNvSpPr txBox="1">
-                  <a:spLocks noRot="1" noChangeAspect="1" noMove="1" noResize="1" noEditPoints="1" noAdjustHandles="1" noChangeArrowheads="1" noChangeShapeType="1" noTextEdit="1"/>
-                </p:cNvSpPr>
-                <p:nvPr/>
-              </p:nvSpPr>
-              <p:spPr>
-                <a:xfrm>
-                  <a:off x="9600010" y="630505"/>
-                  <a:ext cx="500693" cy="369332"/>
-                </a:xfrm>
-                <a:prstGeom prst="rect">
-                  <a:avLst/>
-                </a:prstGeom>
-                <a:blipFill>
-                  <a:blip r:embed="rId6"/>
-                  <a:stretch>
-                    <a:fillRect/>
-                  </a:stretch>
-                </a:blipFill>
-              </p:spPr>
-              <p:txBody>
-                <a:bodyPr/>
-                <a:lstStyle/>
-                <a:p>
-                  <a:r>
-                    <a:rPr lang="zh-TW" altLang="en-US">
-                      <a:noFill/>
-                    </a:rPr>
-                    <a:t> </a:t>
-                  </a:r>
-                </a:p>
-              </p:txBody>
-            </p:sp>
-          </mc:Fallback>
-        </mc:AlternateContent>
-        <p:cxnSp>
-          <p:nvCxnSpPr>
-            <p:cNvPr id="44" name="直線單箭頭接點 43">
-              <a:extLst>
-                <a:ext uri="{FF2B5EF4-FFF2-40B4-BE49-F238E27FC236}">
-                  <a16:creationId xmlns:a16="http://schemas.microsoft.com/office/drawing/2014/main" id="{30658E3C-68AF-4AFA-9D8F-878046A3CB8D}"/>
-                </a:ext>
-              </a:extLst>
-            </p:cNvPr>
-            <p:cNvCxnSpPr>
-              <a:cxnSpLocks/>
-            </p:cNvCxnSpPr>
-            <p:nvPr/>
-          </p:nvCxnSpPr>
-          <p:spPr>
-            <a:xfrm>
-              <a:off x="6796929" y="1730112"/>
-              <a:ext cx="468000" cy="0"/>
-            </a:xfrm>
-            <a:prstGeom prst="straightConnector1">
-              <a:avLst/>
-            </a:prstGeom>
-            <a:solidFill>
-              <a:schemeClr val="bg1"/>
-            </a:solidFill>
-            <a:ln>
-              <a:tailEnd type="triangle"/>
-            </a:ln>
-          </p:spPr>
-          <p:style>
-            <a:lnRef idx="2">
-              <a:schemeClr val="dk1"/>
-            </a:lnRef>
-            <a:fillRef idx="0">
-              <a:schemeClr val="dk1"/>
-            </a:fillRef>
-            <a:effectRef idx="1">
-              <a:schemeClr val="dk1"/>
-            </a:effectRef>
-            <a:fontRef idx="minor">
-              <a:schemeClr val="tx1"/>
-            </a:fontRef>
-          </p:style>
-        </p:cxnSp>
-        <p:cxnSp>
-          <p:nvCxnSpPr>
-            <p:cNvPr id="45" name="直線單箭頭接點 44">
-              <a:extLst>
-                <a:ext uri="{FF2B5EF4-FFF2-40B4-BE49-F238E27FC236}">
-                  <a16:creationId xmlns:a16="http://schemas.microsoft.com/office/drawing/2014/main" id="{F88649E5-D138-4A41-8B32-5CB2ABEC4B4E}"/>
-                </a:ext>
-              </a:extLst>
-            </p:cNvPr>
-            <p:cNvCxnSpPr>
-              <a:cxnSpLocks/>
-            </p:cNvCxnSpPr>
-            <p:nvPr/>
-          </p:nvCxnSpPr>
-          <p:spPr>
-            <a:xfrm flipV="1">
-              <a:off x="6907006" y="1380856"/>
-              <a:ext cx="0" cy="468000"/>
-            </a:xfrm>
-            <a:prstGeom prst="straightConnector1">
-              <a:avLst/>
-            </a:prstGeom>
-            <a:solidFill>
-              <a:schemeClr val="bg1"/>
-            </a:solidFill>
-            <a:ln>
-              <a:tailEnd type="triangle"/>
-            </a:ln>
-          </p:spPr>
-          <p:style>
-            <a:lnRef idx="2">
-              <a:schemeClr val="dk1"/>
-            </a:lnRef>
-            <a:fillRef idx="0">
-              <a:schemeClr val="dk1"/>
-            </a:fillRef>
-            <a:effectRef idx="1">
-              <a:schemeClr val="dk1"/>
-            </a:effectRef>
-            <a:fontRef idx="minor">
-              <a:schemeClr val="tx1"/>
-            </a:fontRef>
-          </p:style>
-        </p:cxnSp>
-        <mc:AlternateContent xmlns:mc="http://schemas.openxmlformats.org/markup-compatibility/2006">
-          <mc:Choice xmlns:a14="http://schemas.microsoft.com/office/drawing/2010/main" Requires="a14">
-            <p:sp>
-              <p:nvSpPr>
-                <p:cNvPr id="46" name="文字方塊 45">
-                  <a:extLst>
-                    <a:ext uri="{FF2B5EF4-FFF2-40B4-BE49-F238E27FC236}">
-                      <a16:creationId xmlns:a16="http://schemas.microsoft.com/office/drawing/2014/main" id="{21849427-CF26-4D15-B1C2-84C965BF4CD0}"/>
-                    </a:ext>
-                  </a:extLst>
-                </p:cNvPr>
-                <p:cNvSpPr txBox="1"/>
-                <p:nvPr/>
-              </p:nvSpPr>
-              <p:spPr>
-                <a:xfrm>
-                  <a:off x="7029599" y="1621373"/>
-                  <a:ext cx="500693" cy="369332"/>
-                </a:xfrm>
-                <a:prstGeom prst="rect">
-                  <a:avLst/>
-                </a:prstGeom>
-                <a:noFill/>
-              </p:spPr>
-              <p:txBody>
-                <a:bodyPr wrap="square" rtlCol="0">
-                  <a:spAutoFit/>
-                </a:bodyPr>
-                <a:lstStyle/>
-                <a:p>
-                  <a:pPr/>
-                  <a14:m>
-                    <m:oMathPara xmlns:m="http://schemas.openxmlformats.org/officeDocument/2006/math">
-                      <m:oMathParaPr>
-                        <m:jc m:val="centerGroup"/>
-                      </m:oMathParaPr>
-                      <m:oMath xmlns:m="http://schemas.openxmlformats.org/officeDocument/2006/math">
-                        <m:r>
-                          <a:rPr lang="en-US" altLang="zh-TW" b="0" i="1" smtClean="0">
-                            <a:latin typeface="Cambria Math" panose="02040503050406030204" pitchFamily="18" charset="0"/>
-                          </a:rPr>
-                          <m:t>𝑥</m:t>
-                        </m:r>
-                      </m:oMath>
-                    </m:oMathPara>
-                  </a14:m>
-                  <a:endParaRPr lang="zh-TW" altLang="en-US" dirty="0"/>
-                </a:p>
-              </p:txBody>
-            </p:sp>
-          </mc:Choice>
-          <mc:Fallback>
-            <p:sp>
-              <p:nvSpPr>
-                <p:cNvPr id="46" name="文字方塊 45">
-                  <a:extLst>
-                    <a:ext uri="{FF2B5EF4-FFF2-40B4-BE49-F238E27FC236}">
-                      <a16:creationId xmlns:a16="http://schemas.microsoft.com/office/drawing/2014/main" id="{21849427-CF26-4D15-B1C2-84C965BF4CD0}"/>
-                    </a:ext>
-                  </a:extLst>
-                </p:cNvPr>
-                <p:cNvSpPr txBox="1">
-                  <a:spLocks noRot="1" noChangeAspect="1" noMove="1" noResize="1" noEditPoints="1" noAdjustHandles="1" noChangeArrowheads="1" noChangeShapeType="1" noTextEdit="1"/>
-                </p:cNvSpPr>
-                <p:nvPr/>
-              </p:nvSpPr>
-              <p:spPr>
-                <a:xfrm>
-                  <a:off x="7029599" y="1621373"/>
-                  <a:ext cx="500693" cy="369332"/>
-                </a:xfrm>
-                <a:prstGeom prst="rect">
-                  <a:avLst/>
-                </a:prstGeom>
-                <a:blipFill>
-                  <a:blip r:embed="rId7"/>
-                  <a:stretch>
-                    <a:fillRect/>
-                  </a:stretch>
-                </a:blipFill>
-              </p:spPr>
-              <p:txBody>
-                <a:bodyPr/>
-                <a:lstStyle/>
-                <a:p>
-                  <a:r>
-                    <a:rPr lang="zh-TW" altLang="en-US">
-                      <a:noFill/>
-                    </a:rPr>
-                    <a:t> </a:t>
-                  </a:r>
-                </a:p>
-              </p:txBody>
-            </p:sp>
-          </mc:Fallback>
-        </mc:AlternateContent>
-        <mc:AlternateContent xmlns:mc="http://schemas.openxmlformats.org/markup-compatibility/2006">
-          <mc:Choice xmlns:a14="http://schemas.microsoft.com/office/drawing/2010/main" Requires="a14">
-            <p:sp>
-              <p:nvSpPr>
-                <p:cNvPr id="47" name="文字方塊 46">
-                  <a:extLst>
-                    <a:ext uri="{FF2B5EF4-FFF2-40B4-BE49-F238E27FC236}">
-                      <a16:creationId xmlns:a16="http://schemas.microsoft.com/office/drawing/2014/main" id="{57A3108B-ED1D-4240-86D1-F021FAA47CA8}"/>
-                    </a:ext>
-                  </a:extLst>
-                </p:cNvPr>
-                <p:cNvSpPr txBox="1"/>
-                <p:nvPr/>
-              </p:nvSpPr>
-              <p:spPr>
-                <a:xfrm>
-                  <a:off x="6784920" y="1150814"/>
-                  <a:ext cx="500693" cy="369332"/>
-                </a:xfrm>
-                <a:prstGeom prst="rect">
-                  <a:avLst/>
-                </a:prstGeom>
-                <a:noFill/>
-              </p:spPr>
-              <p:txBody>
-                <a:bodyPr wrap="square" rtlCol="0">
-                  <a:spAutoFit/>
-                </a:bodyPr>
-                <a:lstStyle/>
-                <a:p>
-                  <a:pPr/>
-                  <a14:m>
-                    <m:oMathPara xmlns:m="http://schemas.openxmlformats.org/officeDocument/2006/math">
-                      <m:oMathParaPr>
-                        <m:jc m:val="centerGroup"/>
-                      </m:oMathParaPr>
-                      <m:oMath xmlns:m="http://schemas.openxmlformats.org/officeDocument/2006/math">
-                        <m:r>
-                          <a:rPr lang="en-US" altLang="zh-TW" b="0" i="1" smtClean="0">
-                            <a:latin typeface="Cambria Math" panose="02040503050406030204" pitchFamily="18" charset="0"/>
-                          </a:rPr>
-                          <m:t>𝑦</m:t>
-                        </m:r>
-                      </m:oMath>
-                    </m:oMathPara>
-                  </a14:m>
-                  <a:endParaRPr lang="zh-TW" altLang="en-US" dirty="0"/>
-                </a:p>
-              </p:txBody>
-            </p:sp>
-          </mc:Choice>
-          <mc:Fallback>
-            <p:sp>
-              <p:nvSpPr>
-                <p:cNvPr id="47" name="文字方塊 46">
-                  <a:extLst>
-                    <a:ext uri="{FF2B5EF4-FFF2-40B4-BE49-F238E27FC236}">
-                      <a16:creationId xmlns:a16="http://schemas.microsoft.com/office/drawing/2014/main" id="{57A3108B-ED1D-4240-86D1-F021FAA47CA8}"/>
-                    </a:ext>
-                  </a:extLst>
-                </p:cNvPr>
-                <p:cNvSpPr txBox="1">
-                  <a:spLocks noRot="1" noChangeAspect="1" noMove="1" noResize="1" noEditPoints="1" noAdjustHandles="1" noChangeArrowheads="1" noChangeShapeType="1" noTextEdit="1"/>
-                </p:cNvSpPr>
-                <p:nvPr/>
-              </p:nvSpPr>
-              <p:spPr>
-                <a:xfrm>
-                  <a:off x="6784920" y="1150814"/>
-                  <a:ext cx="500693" cy="369332"/>
-                </a:xfrm>
-                <a:prstGeom prst="rect">
-                  <a:avLst/>
-                </a:prstGeom>
-                <a:blipFill>
-                  <a:blip r:embed="rId8"/>
-                  <a:stretch>
-                    <a:fillRect b="-6667"/>
-                  </a:stretch>
-                </a:blipFill>
-              </p:spPr>
-              <p:txBody>
-                <a:bodyPr/>
-                <a:lstStyle/>
-                <a:p>
-                  <a:r>
-                    <a:rPr lang="zh-TW" altLang="en-US">
-                      <a:noFill/>
-                    </a:rPr>
-                    <a:t> </a:t>
-                  </a:r>
-                </a:p>
-              </p:txBody>
-            </p:sp>
-          </mc:Fallback>
-        </mc:AlternateContent>
-        <mc:AlternateContent xmlns:mc="http://schemas.openxmlformats.org/markup-compatibility/2006">
-          <mc:Choice xmlns:a14="http://schemas.microsoft.com/office/drawing/2010/main" Requires="a14">
-            <p:sp>
-              <p:nvSpPr>
-                <p:cNvPr id="48" name="文字方塊 47">
-                  <a:extLst>
-                    <a:ext uri="{FF2B5EF4-FFF2-40B4-BE49-F238E27FC236}">
-                      <a16:creationId xmlns:a16="http://schemas.microsoft.com/office/drawing/2014/main" id="{2A110D24-D0A2-4A43-876E-C8B4C8362CF7}"/>
-                    </a:ext>
-                  </a:extLst>
-                </p:cNvPr>
-                <p:cNvSpPr txBox="1"/>
-                <p:nvPr/>
-              </p:nvSpPr>
-              <p:spPr>
-                <a:xfrm>
-                  <a:off x="10003870" y="821005"/>
-                  <a:ext cx="500693" cy="369332"/>
-                </a:xfrm>
-                <a:prstGeom prst="rect">
-                  <a:avLst/>
-                </a:prstGeom>
-                <a:noFill/>
-              </p:spPr>
-              <p:txBody>
-                <a:bodyPr wrap="square" rtlCol="0">
-                  <a:spAutoFit/>
-                </a:bodyPr>
-                <a:lstStyle/>
-                <a:p>
-                  <a:pPr/>
-                  <a14:m>
-                    <m:oMathPara xmlns:m="http://schemas.openxmlformats.org/officeDocument/2006/math">
-                      <m:oMathParaPr>
-                        <m:jc m:val="centerGroup"/>
-                      </m:oMathParaPr>
-                      <m:oMath xmlns:m="http://schemas.openxmlformats.org/officeDocument/2006/math">
-                        <m:r>
-                          <a:rPr lang="en-US" altLang="zh-TW" b="0" i="1" smtClean="0">
-                            <a:latin typeface="Cambria Math" panose="02040503050406030204" pitchFamily="18" charset="0"/>
-                          </a:rPr>
-                          <m:t>𝑀</m:t>
-                        </m:r>
-                      </m:oMath>
-                    </m:oMathPara>
-                  </a14:m>
-                  <a:endParaRPr lang="zh-TW" altLang="en-US" dirty="0"/>
-                </a:p>
-              </p:txBody>
-            </p:sp>
-          </mc:Choice>
-          <mc:Fallback>
-            <p:sp>
-              <p:nvSpPr>
-                <p:cNvPr id="48" name="文字方塊 47">
-                  <a:extLst>
-                    <a:ext uri="{FF2B5EF4-FFF2-40B4-BE49-F238E27FC236}">
-                      <a16:creationId xmlns:a16="http://schemas.microsoft.com/office/drawing/2014/main" id="{2A110D24-D0A2-4A43-876E-C8B4C8362CF7}"/>
-                    </a:ext>
-                  </a:extLst>
-                </p:cNvPr>
-                <p:cNvSpPr txBox="1">
-                  <a:spLocks noRot="1" noChangeAspect="1" noMove="1" noResize="1" noEditPoints="1" noAdjustHandles="1" noChangeArrowheads="1" noChangeShapeType="1" noTextEdit="1"/>
-                </p:cNvSpPr>
-                <p:nvPr/>
-              </p:nvSpPr>
-              <p:spPr>
-                <a:xfrm>
-                  <a:off x="10003870" y="821005"/>
-                  <a:ext cx="500693" cy="369332"/>
-                </a:xfrm>
-                <a:prstGeom prst="rect">
-                  <a:avLst/>
-                </a:prstGeom>
-                <a:blipFill>
-                  <a:blip r:embed="rId9"/>
-                  <a:stretch>
-                    <a:fillRect/>
-                  </a:stretch>
-                </a:blipFill>
-              </p:spPr>
-              <p:txBody>
-                <a:bodyPr/>
-                <a:lstStyle/>
-                <a:p>
-                  <a:r>
-                    <a:rPr lang="zh-TW" altLang="en-US">
-                      <a:noFill/>
-                    </a:rPr>
-                    <a:t> </a:t>
-                  </a:r>
-                </a:p>
-              </p:txBody>
-            </p:sp>
-          </mc:Fallback>
-        </mc:AlternateContent>
-        <p:sp>
-          <p:nvSpPr>
-            <p:cNvPr id="49" name="橢圓 48">
-              <a:extLst>
-                <a:ext uri="{FF2B5EF4-FFF2-40B4-BE49-F238E27FC236}">
-                  <a16:creationId xmlns:a16="http://schemas.microsoft.com/office/drawing/2014/main" id="{19C60B06-0306-4F94-BFF0-66DFCB42995C}"/>
+                  <a16:creationId xmlns:a16="http://schemas.microsoft.com/office/drawing/2014/main" id="{C8BB11C7-0650-47C9-91BB-5D8347953840}"/>
                 </a:ext>
               </a:extLst>
             </p:cNvPr>
@@ -7343,32 +5481,35 @@
           </p:nvSpPr>
           <p:spPr>
             <a:xfrm>
-              <a:off x="9808765" y="953698"/>
-              <a:ext cx="72000" cy="72000"/>
+              <a:off x="4489718" y="3791076"/>
+              <a:ext cx="1185317" cy="1021743"/>
             </a:xfrm>
-            <a:prstGeom prst="ellipse">
-              <a:avLst/>
+            <a:prstGeom prst="hexagon">
+              <a:avLst>
+                <a:gd name="adj" fmla="val 29067"/>
+                <a:gd name="vf" fmla="val 115470"/>
+              </a:avLst>
             </a:prstGeom>
-            <a:solidFill>
-              <a:schemeClr val="tx1"/>
-            </a:solidFill>
-            <a:ln w="6350">
+            <a:grpFill/>
+            <a:ln>
               <a:solidFill>
-                <a:schemeClr val="tx1"/>
+                <a:schemeClr val="bg1">
+                  <a:lumMod val="50000"/>
+                </a:schemeClr>
               </a:solidFill>
             </a:ln>
           </p:spPr>
           <p:style>
             <a:lnRef idx="2">
-              <a:schemeClr val="dk1">
+              <a:schemeClr val="accent1">
                 <a:shade val="50000"/>
               </a:schemeClr>
             </a:lnRef>
             <a:fillRef idx="1">
-              <a:schemeClr val="dk1"/>
+              <a:schemeClr val="accent1"/>
             </a:fillRef>
             <a:effectRef idx="0">
-              <a:schemeClr val="dk1"/>
+              <a:schemeClr val="accent1"/>
             </a:effectRef>
             <a:fontRef idx="minor">
               <a:schemeClr val="lt1"/>
@@ -7385,10 +5526,10 @@
         </p:sp>
         <p:sp>
           <p:nvSpPr>
-            <p:cNvPr id="50" name="橢圓 49">
+            <p:cNvPr id="35" name="六邊形 34">
               <a:extLst>
                 <a:ext uri="{FF2B5EF4-FFF2-40B4-BE49-F238E27FC236}">
-                  <a16:creationId xmlns:a16="http://schemas.microsoft.com/office/drawing/2014/main" id="{4B560E75-401F-4BB6-BF64-7E4B3433D8CE}"/>
+                  <a16:creationId xmlns:a16="http://schemas.microsoft.com/office/drawing/2014/main" id="{6E7512DF-B285-43AD-944F-FF01D93F114B}"/>
                 </a:ext>
               </a:extLst>
             </p:cNvPr>
@@ -7397,32 +5538,35 @@
           </p:nvSpPr>
           <p:spPr>
             <a:xfrm>
-              <a:off x="10456465" y="1318029"/>
-              <a:ext cx="72000" cy="72000"/>
+              <a:off x="3601272" y="4302146"/>
+              <a:ext cx="1185317" cy="1021743"/>
             </a:xfrm>
-            <a:prstGeom prst="ellipse">
-              <a:avLst/>
+            <a:prstGeom prst="hexagon">
+              <a:avLst>
+                <a:gd name="adj" fmla="val 29067"/>
+                <a:gd name="vf" fmla="val 115470"/>
+              </a:avLst>
             </a:prstGeom>
-            <a:solidFill>
-              <a:schemeClr val="tx1"/>
-            </a:solidFill>
-            <a:ln w="6350">
+            <a:grpFill/>
+            <a:ln>
               <a:solidFill>
-                <a:schemeClr val="tx1"/>
+                <a:schemeClr val="bg1">
+                  <a:lumMod val="50000"/>
+                </a:schemeClr>
               </a:solidFill>
             </a:ln>
           </p:spPr>
           <p:style>
             <a:lnRef idx="2">
-              <a:schemeClr val="dk1">
+              <a:schemeClr val="accent1">
                 <a:shade val="50000"/>
               </a:schemeClr>
             </a:lnRef>
             <a:fillRef idx="1">
-              <a:schemeClr val="dk1"/>
+              <a:schemeClr val="accent1"/>
             </a:fillRef>
             <a:effectRef idx="0">
-              <a:schemeClr val="dk1"/>
+              <a:schemeClr val="accent1"/>
             </a:effectRef>
             <a:fontRef idx="minor">
               <a:schemeClr val="lt1"/>
@@ -7437,341 +5581,2177 @@
             </a:p>
           </p:txBody>
         </p:sp>
-        <mc:AlternateContent xmlns:mc="http://schemas.openxmlformats.org/markup-compatibility/2006">
-          <mc:Choice xmlns:a14="http://schemas.microsoft.com/office/drawing/2010/main" Requires="a14">
-            <p:sp>
-              <p:nvSpPr>
-                <p:cNvPr id="51" name="文字方塊 50">
-                  <a:extLst>
-                    <a:ext uri="{FF2B5EF4-FFF2-40B4-BE49-F238E27FC236}">
-                      <a16:creationId xmlns:a16="http://schemas.microsoft.com/office/drawing/2014/main" id="{0B148C38-F219-42E5-933C-185C3D6FA5AC}"/>
-                    </a:ext>
-                  </a:extLst>
-                </p:cNvPr>
-                <p:cNvSpPr txBox="1"/>
-                <p:nvPr/>
-              </p:nvSpPr>
-              <p:spPr>
-                <a:xfrm>
-                  <a:off x="9484758" y="1697305"/>
-                  <a:ext cx="500693" cy="369332"/>
-                </a:xfrm>
-                <a:prstGeom prst="rect">
-                  <a:avLst/>
-                </a:prstGeom>
-                <a:noFill/>
-              </p:spPr>
-              <p:txBody>
-                <a:bodyPr wrap="square" rtlCol="0">
-                  <a:spAutoFit/>
-                </a:bodyPr>
-                <a:lstStyle/>
-                <a:p>
-                  <a:pPr/>
-                  <a14:m>
-                    <m:oMathPara xmlns:m="http://schemas.openxmlformats.org/officeDocument/2006/math">
-                      <m:oMathParaPr>
-                        <m:jc m:val="centerGroup"/>
-                      </m:oMathParaPr>
-                      <m:oMath xmlns:m="http://schemas.openxmlformats.org/officeDocument/2006/math">
-                        <m:r>
-                          <m:rPr>
-                            <m:sty m:val="p"/>
-                          </m:rPr>
-                          <a:rPr lang="en-US" altLang="zh-TW" b="0" i="0" smtClean="0">
-                            <a:latin typeface="Cambria Math" panose="02040503050406030204" pitchFamily="18" charset="0"/>
-                          </a:rPr>
-                          <m:t>Γ</m:t>
-                        </m:r>
-                      </m:oMath>
-                    </m:oMathPara>
-                  </a14:m>
-                  <a:endParaRPr lang="zh-TW" altLang="en-US" dirty="0"/>
-                </a:p>
-              </p:txBody>
-            </p:sp>
-          </mc:Choice>
-          <mc:Fallback>
-            <p:sp>
-              <p:nvSpPr>
-                <p:cNvPr id="51" name="文字方塊 50">
-                  <a:extLst>
-                    <a:ext uri="{FF2B5EF4-FFF2-40B4-BE49-F238E27FC236}">
-                      <a16:creationId xmlns:a16="http://schemas.microsoft.com/office/drawing/2014/main" id="{0B148C38-F219-42E5-933C-185C3D6FA5AC}"/>
-                    </a:ext>
-                  </a:extLst>
-                </p:cNvPr>
-                <p:cNvSpPr txBox="1">
-                  <a:spLocks noRot="1" noChangeAspect="1" noMove="1" noResize="1" noEditPoints="1" noAdjustHandles="1" noChangeArrowheads="1" noChangeShapeType="1" noTextEdit="1"/>
-                </p:cNvSpPr>
-                <p:nvPr/>
-              </p:nvSpPr>
-              <p:spPr>
-                <a:xfrm>
-                  <a:off x="9484758" y="1697305"/>
-                  <a:ext cx="500693" cy="369332"/>
-                </a:xfrm>
-                <a:prstGeom prst="rect">
-                  <a:avLst/>
-                </a:prstGeom>
-                <a:blipFill>
-                  <a:blip r:embed="rId10"/>
-                  <a:stretch>
-                    <a:fillRect/>
-                  </a:stretch>
-                </a:blipFill>
-              </p:spPr>
-              <p:txBody>
-                <a:bodyPr/>
-                <a:lstStyle/>
-                <a:p>
-                  <a:r>
-                    <a:rPr lang="zh-TW" altLang="en-US">
-                      <a:noFill/>
-                    </a:rPr>
-                    <a:t> </a:t>
-                  </a:r>
-                </a:p>
-              </p:txBody>
-            </p:sp>
-          </mc:Fallback>
-        </mc:AlternateContent>
-        <p:sp>
-          <p:nvSpPr>
-            <p:cNvPr id="52" name="橢圓 51">
-              <a:extLst>
-                <a:ext uri="{FF2B5EF4-FFF2-40B4-BE49-F238E27FC236}">
-                  <a16:creationId xmlns:a16="http://schemas.microsoft.com/office/drawing/2014/main" id="{10D67287-F92B-4F97-B84E-5D50B63BF77E}"/>
-                </a:ext>
-              </a:extLst>
-            </p:cNvPr>
-            <p:cNvSpPr/>
-            <p:nvPr/>
-          </p:nvSpPr>
-          <p:spPr>
-            <a:xfrm>
-              <a:off x="10132615" y="1135863"/>
-              <a:ext cx="72000" cy="72000"/>
-            </a:xfrm>
-            <a:prstGeom prst="ellipse">
-              <a:avLst/>
-            </a:prstGeom>
+      </p:grpSp>
+      <p:sp>
+        <p:nvSpPr>
+          <p:cNvPr id="20" name="橢圓 19">
+            <a:extLst>
+              <a:ext uri="{FF2B5EF4-FFF2-40B4-BE49-F238E27FC236}">
+                <a16:creationId xmlns:a16="http://schemas.microsoft.com/office/drawing/2014/main" id="{E12CB9F5-BD5A-4E6D-A341-F21A6C1148B2}"/>
+              </a:ext>
+            </a:extLst>
+          </p:cNvPr>
+          <p:cNvSpPr/>
+          <p:nvPr/>
+        </p:nvSpPr>
+        <p:spPr>
+          <a:xfrm>
+            <a:off x="6817153" y="1644560"/>
+            <a:ext cx="173669" cy="173664"/>
+          </a:xfrm>
+          <a:prstGeom prst="ellipse">
+            <a:avLst/>
+          </a:prstGeom>
+          <a:solidFill>
+            <a:srgbClr val="AAEEFF"/>
+          </a:solidFill>
+          <a:ln w="6350">
             <a:solidFill>
               <a:schemeClr val="tx1"/>
             </a:solidFill>
-            <a:ln w="6350">
-              <a:solidFill>
-                <a:schemeClr val="tx1"/>
-              </a:solidFill>
-            </a:ln>
-          </p:spPr>
-          <p:style>
-            <a:lnRef idx="2">
-              <a:schemeClr val="dk1">
-                <a:shade val="50000"/>
-              </a:schemeClr>
-            </a:lnRef>
-            <a:fillRef idx="1">
-              <a:schemeClr val="dk1"/>
-            </a:fillRef>
-            <a:effectRef idx="0">
-              <a:schemeClr val="dk1"/>
-            </a:effectRef>
-            <a:fontRef idx="minor">
-              <a:schemeClr val="lt1"/>
-            </a:fontRef>
-          </p:style>
-          <p:txBody>
-            <a:bodyPr rtlCol="0" anchor="ctr"/>
-            <a:lstStyle/>
-            <a:p>
-              <a:pPr algn="ctr"/>
-              <a:endParaRPr lang="zh-TW" altLang="en-US" dirty="0"/>
-            </a:p>
-          </p:txBody>
-        </p:sp>
-        <p:sp>
-          <p:nvSpPr>
-            <p:cNvPr id="53" name="橢圓 52">
-              <a:extLst>
-                <a:ext uri="{FF2B5EF4-FFF2-40B4-BE49-F238E27FC236}">
-                  <a16:creationId xmlns:a16="http://schemas.microsoft.com/office/drawing/2014/main" id="{ABE37A37-748C-4DA8-BBEF-9530FFFE017B}"/>
-                </a:ext>
-              </a:extLst>
-            </p:cNvPr>
-            <p:cNvSpPr/>
-            <p:nvPr/>
-          </p:nvSpPr>
-          <p:spPr>
-            <a:xfrm>
-              <a:off x="9818646" y="1694112"/>
-              <a:ext cx="72000" cy="72000"/>
-            </a:xfrm>
-            <a:prstGeom prst="ellipse">
-              <a:avLst/>
-            </a:prstGeom>
+          </a:ln>
+        </p:spPr>
+        <p:style>
+          <a:lnRef idx="2">
+            <a:schemeClr val="dk1">
+              <a:shade val="50000"/>
+            </a:schemeClr>
+          </a:lnRef>
+          <a:fillRef idx="1">
+            <a:schemeClr val="dk1"/>
+          </a:fillRef>
+          <a:effectRef idx="0">
+            <a:schemeClr val="dk1"/>
+          </a:effectRef>
+          <a:fontRef idx="minor">
+            <a:schemeClr val="lt1"/>
+          </a:fontRef>
+        </p:style>
+        <p:txBody>
+          <a:bodyPr rtlCol="0" anchor="ctr"/>
+          <a:lstStyle/>
+          <a:p>
+            <a:pPr algn="ctr"/>
+            <a:endParaRPr lang="zh-TW" altLang="en-US"/>
+          </a:p>
+        </p:txBody>
+      </p:sp>
+      <p:sp>
+        <p:nvSpPr>
+          <p:cNvPr id="21" name="橢圓 20">
+            <a:extLst>
+              <a:ext uri="{FF2B5EF4-FFF2-40B4-BE49-F238E27FC236}">
+                <a16:creationId xmlns:a16="http://schemas.microsoft.com/office/drawing/2014/main" id="{64519D7C-B262-47AF-AB3A-84DEE55D681F}"/>
+              </a:ext>
+            </a:extLst>
+          </p:cNvPr>
+          <p:cNvSpPr/>
+          <p:nvPr/>
+        </p:nvSpPr>
+        <p:spPr>
+          <a:xfrm>
+            <a:off x="7404993" y="1644560"/>
+            <a:ext cx="173669" cy="173664"/>
+          </a:xfrm>
+          <a:prstGeom prst="ellipse">
+            <a:avLst/>
+          </a:prstGeom>
+          <a:solidFill>
+            <a:srgbClr val="AAEEFF"/>
+          </a:solidFill>
+          <a:ln w="6350">
             <a:solidFill>
               <a:schemeClr val="tx1"/>
             </a:solidFill>
-            <a:ln w="6350">
-              <a:solidFill>
-                <a:schemeClr val="tx1"/>
-              </a:solidFill>
-            </a:ln>
-          </p:spPr>
-          <p:style>
-            <a:lnRef idx="2">
-              <a:schemeClr val="dk1">
-                <a:shade val="50000"/>
-              </a:schemeClr>
-            </a:lnRef>
-            <a:fillRef idx="1">
-              <a:schemeClr val="dk1"/>
-            </a:fillRef>
-            <a:effectRef idx="0">
-              <a:schemeClr val="dk1"/>
-            </a:effectRef>
-            <a:fontRef idx="minor">
-              <a:schemeClr val="lt1"/>
-            </a:fontRef>
-          </p:style>
-          <p:txBody>
-            <a:bodyPr rtlCol="0" anchor="ctr"/>
-            <a:lstStyle/>
-            <a:p>
-              <a:pPr algn="ctr"/>
-              <a:endParaRPr lang="zh-TW" altLang="en-US" dirty="0"/>
-            </a:p>
-          </p:txBody>
-        </p:sp>
-        <p:pic>
-          <p:nvPicPr>
-            <p:cNvPr id="54" name="圖片 53">
-              <a:extLst>
-                <a:ext uri="{FF2B5EF4-FFF2-40B4-BE49-F238E27FC236}">
-                  <a16:creationId xmlns:a16="http://schemas.microsoft.com/office/drawing/2014/main" id="{F0F74467-ECA4-4115-A98D-39278A7F3F7F}"/>
-                </a:ext>
-              </a:extLst>
-            </p:cNvPr>
-            <p:cNvPicPr>
-              <a:picLocks noChangeAspect="1"/>
-            </p:cNvPicPr>
-            <p:nvPr/>
-          </p:nvPicPr>
-          <p:blipFill rotWithShape="1">
-            <a:blip r:embed="rId11"/>
-            <a:srcRect l="8603"/>
-            <a:stretch/>
-          </p:blipFill>
-          <p:spPr>
-            <a:xfrm>
-              <a:off x="7148529" y="3600450"/>
-              <a:ext cx="3056086" cy="3086530"/>
-            </a:xfrm>
-            <a:prstGeom prst="rect">
-              <a:avLst/>
-            </a:prstGeom>
-          </p:spPr>
-        </p:pic>
-        <mc:AlternateContent xmlns:mc="http://schemas.openxmlformats.org/markup-compatibility/2006">
-          <mc:Choice xmlns:a14="http://schemas.microsoft.com/office/drawing/2010/main" Requires="a14">
-            <p:sp>
-              <p:nvSpPr>
-                <p:cNvPr id="56" name="文字方塊 55">
-                  <a:extLst>
-                    <a:ext uri="{FF2B5EF4-FFF2-40B4-BE49-F238E27FC236}">
-                      <a16:creationId xmlns:a16="http://schemas.microsoft.com/office/drawing/2014/main" id="{792D315E-1AB0-4FD5-AC71-56B13006FDF1}"/>
-                    </a:ext>
-                  </a:extLst>
-                </p:cNvPr>
-                <p:cNvSpPr txBox="1"/>
-                <p:nvPr/>
-              </p:nvSpPr>
-              <p:spPr>
-                <a:xfrm>
-                  <a:off x="6744669" y="4907280"/>
-                  <a:ext cx="563880" cy="369332"/>
-                </a:xfrm>
-                <a:prstGeom prst="rect">
-                  <a:avLst/>
-                </a:prstGeom>
-                <a:noFill/>
-              </p:spPr>
-              <p:txBody>
-                <a:bodyPr wrap="square" rtlCol="0">
-                  <a:spAutoFit/>
-                </a:bodyPr>
-                <a:lstStyle/>
-                <a:p>
-                  <a14:m>
-                    <m:oMathPara xmlns:m="http://schemas.openxmlformats.org/officeDocument/2006/math">
-                      <m:oMathParaPr>
-                        <m:jc m:val="centerGroup"/>
-                      </m:oMathParaPr>
-                      <m:oMath xmlns:m="http://schemas.openxmlformats.org/officeDocument/2006/math">
-                        <m:r>
-                          <m:rPr>
-                            <m:sty m:val="p"/>
-                          </m:rPr>
-                          <a:rPr lang="en-US" altLang="zh-TW" i="0" dirty="0" smtClean="0">
-                            <a:latin typeface="Cambria Math" panose="02040503050406030204" pitchFamily="18" charset="0"/>
-                          </a:rPr>
-                          <m:t>eV</m:t>
-                        </m:r>
-                      </m:oMath>
-                    </m:oMathPara>
-                  </a14:m>
-                  <a:endParaRPr lang="zh-TW" altLang="en-US" dirty="0"/>
-                </a:p>
-              </p:txBody>
-            </p:sp>
-          </mc:Choice>
-          <mc:Fallback>
-            <p:sp>
-              <p:nvSpPr>
-                <p:cNvPr id="56" name="文字方塊 55">
-                  <a:extLst>
-                    <a:ext uri="{FF2B5EF4-FFF2-40B4-BE49-F238E27FC236}">
-                      <a16:creationId xmlns:a16="http://schemas.microsoft.com/office/drawing/2014/main" id="{792D315E-1AB0-4FD5-AC71-56B13006FDF1}"/>
-                    </a:ext>
-                  </a:extLst>
-                </p:cNvPr>
-                <p:cNvSpPr txBox="1">
-                  <a:spLocks noRot="1" noChangeAspect="1" noMove="1" noResize="1" noEditPoints="1" noAdjustHandles="1" noChangeArrowheads="1" noChangeShapeType="1" noTextEdit="1"/>
-                </p:cNvSpPr>
-                <p:nvPr/>
-              </p:nvSpPr>
-              <p:spPr>
-                <a:xfrm>
-                  <a:off x="6744669" y="4907280"/>
-                  <a:ext cx="563880" cy="369332"/>
-                </a:xfrm>
-                <a:prstGeom prst="rect">
-                  <a:avLst/>
-                </a:prstGeom>
-                <a:blipFill>
-                  <a:blip r:embed="rId12"/>
-                  <a:stretch>
-                    <a:fillRect/>
-                  </a:stretch>
-                </a:blipFill>
-              </p:spPr>
-              <p:txBody>
-                <a:bodyPr/>
-                <a:lstStyle/>
-                <a:p>
-                  <a:r>
-                    <a:rPr lang="zh-TW" altLang="en-US">
-                      <a:noFill/>
-                    </a:rPr>
-                    <a:t> </a:t>
-                  </a:r>
-                </a:p>
-              </p:txBody>
-            </p:sp>
-          </mc:Fallback>
-        </mc:AlternateContent>
-      </p:grpSp>
+          </a:ln>
+        </p:spPr>
+        <p:style>
+          <a:lnRef idx="2">
+            <a:schemeClr val="dk1">
+              <a:shade val="50000"/>
+            </a:schemeClr>
+          </a:lnRef>
+          <a:fillRef idx="1">
+            <a:schemeClr val="dk1"/>
+          </a:fillRef>
+          <a:effectRef idx="0">
+            <a:schemeClr val="dk1"/>
+          </a:effectRef>
+          <a:fontRef idx="minor">
+            <a:schemeClr val="lt1"/>
+          </a:fontRef>
+        </p:style>
+        <p:txBody>
+          <a:bodyPr rtlCol="0" anchor="ctr"/>
+          <a:lstStyle/>
+          <a:p>
+            <a:pPr algn="ctr"/>
+            <a:endParaRPr lang="zh-TW" altLang="en-US"/>
+          </a:p>
+        </p:txBody>
+      </p:sp>
+      <p:sp>
+        <p:nvSpPr>
+          <p:cNvPr id="22" name="橢圓 21">
+            <a:extLst>
+              <a:ext uri="{FF2B5EF4-FFF2-40B4-BE49-F238E27FC236}">
+                <a16:creationId xmlns:a16="http://schemas.microsoft.com/office/drawing/2014/main" id="{12B6EB9D-844C-45FE-B4A4-CAB355838C20}"/>
+              </a:ext>
+            </a:extLst>
+          </p:cNvPr>
+          <p:cNvSpPr/>
+          <p:nvPr/>
+        </p:nvSpPr>
+        <p:spPr>
+          <a:xfrm>
+            <a:off x="7697160" y="2137418"/>
+            <a:ext cx="173669" cy="173664"/>
+          </a:xfrm>
+          <a:prstGeom prst="ellipse">
+            <a:avLst/>
+          </a:prstGeom>
+          <a:solidFill>
+            <a:srgbClr val="AAEEFF"/>
+          </a:solidFill>
+          <a:ln w="6350">
+            <a:solidFill>
+              <a:schemeClr val="tx1"/>
+            </a:solidFill>
+          </a:ln>
+        </p:spPr>
+        <p:style>
+          <a:lnRef idx="2">
+            <a:schemeClr val="dk1">
+              <a:shade val="50000"/>
+            </a:schemeClr>
+          </a:lnRef>
+          <a:fillRef idx="1">
+            <a:schemeClr val="dk1"/>
+          </a:fillRef>
+          <a:effectRef idx="0">
+            <a:schemeClr val="dk1"/>
+          </a:effectRef>
+          <a:fontRef idx="minor">
+            <a:schemeClr val="lt1"/>
+          </a:fontRef>
+        </p:style>
+        <p:txBody>
+          <a:bodyPr rtlCol="0" anchor="ctr"/>
+          <a:lstStyle/>
+          <a:p>
+            <a:pPr algn="ctr"/>
+            <a:endParaRPr lang="zh-TW" altLang="en-US" dirty="0"/>
+          </a:p>
+        </p:txBody>
+      </p:sp>
+      <p:sp>
+        <p:nvSpPr>
+          <p:cNvPr id="23" name="橢圓 22">
+            <a:extLst>
+              <a:ext uri="{FF2B5EF4-FFF2-40B4-BE49-F238E27FC236}">
+                <a16:creationId xmlns:a16="http://schemas.microsoft.com/office/drawing/2014/main" id="{EE106ADB-6579-498F-8EC8-A6BAC8638684}"/>
+              </a:ext>
+            </a:extLst>
+          </p:cNvPr>
+          <p:cNvSpPr/>
+          <p:nvPr/>
+        </p:nvSpPr>
+        <p:spPr>
+          <a:xfrm>
+            <a:off x="8263549" y="2137418"/>
+            <a:ext cx="173669" cy="173664"/>
+          </a:xfrm>
+          <a:prstGeom prst="ellipse">
+            <a:avLst/>
+          </a:prstGeom>
+          <a:solidFill>
+            <a:srgbClr val="AAEEFF"/>
+          </a:solidFill>
+          <a:ln w="6350">
+            <a:solidFill>
+              <a:schemeClr val="tx1"/>
+            </a:solidFill>
+          </a:ln>
+        </p:spPr>
+        <p:style>
+          <a:lnRef idx="2">
+            <a:schemeClr val="dk1">
+              <a:shade val="50000"/>
+            </a:schemeClr>
+          </a:lnRef>
+          <a:fillRef idx="1">
+            <a:schemeClr val="dk1"/>
+          </a:fillRef>
+          <a:effectRef idx="0">
+            <a:schemeClr val="dk1"/>
+          </a:effectRef>
+          <a:fontRef idx="minor">
+            <a:schemeClr val="lt1"/>
+          </a:fontRef>
+        </p:style>
+        <p:txBody>
+          <a:bodyPr rtlCol="0" anchor="ctr"/>
+          <a:lstStyle/>
+          <a:p>
+            <a:pPr algn="ctr"/>
+            <a:endParaRPr lang="zh-TW" altLang="en-US"/>
+          </a:p>
+        </p:txBody>
+      </p:sp>
+      <p:sp>
+        <p:nvSpPr>
+          <p:cNvPr id="24" name="橢圓 23">
+            <a:extLst>
+              <a:ext uri="{FF2B5EF4-FFF2-40B4-BE49-F238E27FC236}">
+                <a16:creationId xmlns:a16="http://schemas.microsoft.com/office/drawing/2014/main" id="{8171FD58-75EF-4568-9740-D2EA00541817}"/>
+              </a:ext>
+            </a:extLst>
+          </p:cNvPr>
+          <p:cNvSpPr/>
+          <p:nvPr/>
+        </p:nvSpPr>
+        <p:spPr>
+          <a:xfrm>
+            <a:off x="6817153" y="2642955"/>
+            <a:ext cx="173669" cy="173664"/>
+          </a:xfrm>
+          <a:prstGeom prst="ellipse">
+            <a:avLst/>
+          </a:prstGeom>
+          <a:solidFill>
+            <a:srgbClr val="AAEEFF"/>
+          </a:solidFill>
+          <a:ln w="6350">
+            <a:solidFill>
+              <a:schemeClr val="tx1"/>
+            </a:solidFill>
+          </a:ln>
+        </p:spPr>
+        <p:style>
+          <a:lnRef idx="2">
+            <a:schemeClr val="dk1">
+              <a:shade val="50000"/>
+            </a:schemeClr>
+          </a:lnRef>
+          <a:fillRef idx="1">
+            <a:schemeClr val="dk1"/>
+          </a:fillRef>
+          <a:effectRef idx="0">
+            <a:schemeClr val="dk1"/>
+          </a:effectRef>
+          <a:fontRef idx="minor">
+            <a:schemeClr val="lt1"/>
+          </a:fontRef>
+        </p:style>
+        <p:txBody>
+          <a:bodyPr rtlCol="0" anchor="ctr"/>
+          <a:lstStyle/>
+          <a:p>
+            <a:pPr algn="ctr"/>
+            <a:endParaRPr lang="zh-TW" altLang="en-US"/>
+          </a:p>
+        </p:txBody>
+      </p:sp>
+      <p:sp>
+        <p:nvSpPr>
+          <p:cNvPr id="25" name="橢圓 24">
+            <a:extLst>
+              <a:ext uri="{FF2B5EF4-FFF2-40B4-BE49-F238E27FC236}">
+                <a16:creationId xmlns:a16="http://schemas.microsoft.com/office/drawing/2014/main" id="{D619EBBE-5DE8-4D68-8DD2-B2B113818756}"/>
+              </a:ext>
+            </a:extLst>
+          </p:cNvPr>
+          <p:cNvSpPr/>
+          <p:nvPr/>
+        </p:nvSpPr>
+        <p:spPr>
+          <a:xfrm>
+            <a:off x="7404993" y="2642955"/>
+            <a:ext cx="173669" cy="173664"/>
+          </a:xfrm>
+          <a:prstGeom prst="ellipse">
+            <a:avLst/>
+          </a:prstGeom>
+          <a:solidFill>
+            <a:srgbClr val="AAEEFF"/>
+          </a:solidFill>
+          <a:ln w="6350">
+            <a:solidFill>
+              <a:schemeClr val="tx1"/>
+            </a:solidFill>
+          </a:ln>
+        </p:spPr>
+        <p:style>
+          <a:lnRef idx="2">
+            <a:schemeClr val="dk1">
+              <a:shade val="50000"/>
+            </a:schemeClr>
+          </a:lnRef>
+          <a:fillRef idx="1">
+            <a:schemeClr val="dk1"/>
+          </a:fillRef>
+          <a:effectRef idx="0">
+            <a:schemeClr val="dk1"/>
+          </a:effectRef>
+          <a:fontRef idx="minor">
+            <a:schemeClr val="lt1"/>
+          </a:fontRef>
+        </p:style>
+        <p:txBody>
+          <a:bodyPr rtlCol="0" anchor="ctr"/>
+          <a:lstStyle/>
+          <a:p>
+            <a:pPr algn="ctr"/>
+            <a:endParaRPr lang="zh-TW" altLang="en-US"/>
+          </a:p>
+        </p:txBody>
+      </p:sp>
+      <p:sp>
+        <p:nvSpPr>
+          <p:cNvPr id="26" name="橢圓 25">
+            <a:extLst>
+              <a:ext uri="{FF2B5EF4-FFF2-40B4-BE49-F238E27FC236}">
+                <a16:creationId xmlns:a16="http://schemas.microsoft.com/office/drawing/2014/main" id="{DFE5A13F-8DE8-4952-A495-5BE2D171C6EF}"/>
+              </a:ext>
+            </a:extLst>
+          </p:cNvPr>
+          <p:cNvSpPr/>
+          <p:nvPr/>
+        </p:nvSpPr>
+        <p:spPr>
+          <a:xfrm>
+            <a:off x="7697160" y="1138827"/>
+            <a:ext cx="173669" cy="173664"/>
+          </a:xfrm>
+          <a:prstGeom prst="ellipse">
+            <a:avLst/>
+          </a:prstGeom>
+          <a:solidFill>
+            <a:srgbClr val="AAEEFF"/>
+          </a:solidFill>
+          <a:ln w="6350">
+            <a:solidFill>
+              <a:schemeClr val="tx1"/>
+            </a:solidFill>
+          </a:ln>
+        </p:spPr>
+        <p:style>
+          <a:lnRef idx="2">
+            <a:schemeClr val="dk1">
+              <a:shade val="50000"/>
+            </a:schemeClr>
+          </a:lnRef>
+          <a:fillRef idx="1">
+            <a:schemeClr val="dk1"/>
+          </a:fillRef>
+          <a:effectRef idx="0">
+            <a:schemeClr val="dk1"/>
+          </a:effectRef>
+          <a:fontRef idx="minor">
+            <a:schemeClr val="lt1"/>
+          </a:fontRef>
+        </p:style>
+        <p:txBody>
+          <a:bodyPr rtlCol="0" anchor="ctr"/>
+          <a:lstStyle/>
+          <a:p>
+            <a:pPr algn="ctr"/>
+            <a:endParaRPr lang="zh-TW" altLang="en-US"/>
+          </a:p>
+        </p:txBody>
+      </p:sp>
+      <p:sp>
+        <p:nvSpPr>
+          <p:cNvPr id="27" name="橢圓 26">
+            <a:extLst>
+              <a:ext uri="{FF2B5EF4-FFF2-40B4-BE49-F238E27FC236}">
+                <a16:creationId xmlns:a16="http://schemas.microsoft.com/office/drawing/2014/main" id="{F247B4BA-93BB-4874-8D9C-078F61DCF66D}"/>
+              </a:ext>
+            </a:extLst>
+          </p:cNvPr>
+          <p:cNvSpPr/>
+          <p:nvPr/>
+        </p:nvSpPr>
+        <p:spPr>
+          <a:xfrm>
+            <a:off x="8263549" y="1138827"/>
+            <a:ext cx="173669" cy="173664"/>
+          </a:xfrm>
+          <a:prstGeom prst="ellipse">
+            <a:avLst/>
+          </a:prstGeom>
+          <a:solidFill>
+            <a:srgbClr val="AAEEFF"/>
+          </a:solidFill>
+          <a:ln w="6350">
+            <a:solidFill>
+              <a:schemeClr val="tx1"/>
+            </a:solidFill>
+          </a:ln>
+        </p:spPr>
+        <p:style>
+          <a:lnRef idx="2">
+            <a:schemeClr val="dk1">
+              <a:shade val="50000"/>
+            </a:schemeClr>
+          </a:lnRef>
+          <a:fillRef idx="1">
+            <a:schemeClr val="dk1"/>
+          </a:fillRef>
+          <a:effectRef idx="0">
+            <a:schemeClr val="dk1"/>
+          </a:effectRef>
+          <a:fontRef idx="minor">
+            <a:schemeClr val="lt1"/>
+          </a:fontRef>
+        </p:style>
+        <p:txBody>
+          <a:bodyPr rtlCol="0" anchor="ctr"/>
+          <a:lstStyle/>
+          <a:p>
+            <a:pPr algn="ctr"/>
+            <a:endParaRPr lang="zh-TW" altLang="en-US"/>
+          </a:p>
+        </p:txBody>
+      </p:sp>
+      <p:sp>
+        <p:nvSpPr>
+          <p:cNvPr id="28" name="橢圓 27">
+            <a:extLst>
+              <a:ext uri="{FF2B5EF4-FFF2-40B4-BE49-F238E27FC236}">
+                <a16:creationId xmlns:a16="http://schemas.microsoft.com/office/drawing/2014/main" id="{1B6190AB-051F-4F48-8761-E18EBC54ACB1}"/>
+              </a:ext>
+            </a:extLst>
+          </p:cNvPr>
+          <p:cNvSpPr/>
+          <p:nvPr/>
+        </p:nvSpPr>
+        <p:spPr>
+          <a:xfrm>
+            <a:off x="8552983" y="1644560"/>
+            <a:ext cx="173669" cy="173664"/>
+          </a:xfrm>
+          <a:prstGeom prst="ellipse">
+            <a:avLst/>
+          </a:prstGeom>
+          <a:solidFill>
+            <a:srgbClr val="AAEEFF"/>
+          </a:solidFill>
+          <a:ln w="6350">
+            <a:solidFill>
+              <a:schemeClr val="tx1"/>
+            </a:solidFill>
+          </a:ln>
+        </p:spPr>
+        <p:style>
+          <a:lnRef idx="2">
+            <a:schemeClr val="dk1">
+              <a:shade val="50000"/>
+            </a:schemeClr>
+          </a:lnRef>
+          <a:fillRef idx="1">
+            <a:schemeClr val="dk1"/>
+          </a:fillRef>
+          <a:effectRef idx="0">
+            <a:schemeClr val="dk1"/>
+          </a:effectRef>
+          <a:fontRef idx="minor">
+            <a:schemeClr val="lt1"/>
+          </a:fontRef>
+        </p:style>
+        <p:txBody>
+          <a:bodyPr rtlCol="0" anchor="ctr"/>
+          <a:lstStyle/>
+          <a:p>
+            <a:pPr algn="ctr"/>
+            <a:endParaRPr lang="zh-TW" altLang="en-US"/>
+          </a:p>
+        </p:txBody>
+      </p:sp>
+      <p:sp>
+        <p:nvSpPr>
+          <p:cNvPr id="29" name="橢圓 28">
+            <a:extLst>
+              <a:ext uri="{FF2B5EF4-FFF2-40B4-BE49-F238E27FC236}">
+                <a16:creationId xmlns:a16="http://schemas.microsoft.com/office/drawing/2014/main" id="{EA8A417B-375B-4A2F-A59B-2FBEE43962C1}"/>
+              </a:ext>
+            </a:extLst>
+          </p:cNvPr>
+          <p:cNvSpPr/>
+          <p:nvPr/>
+        </p:nvSpPr>
+        <p:spPr>
+          <a:xfrm>
+            <a:off x="6817153" y="644994"/>
+            <a:ext cx="173669" cy="173664"/>
+          </a:xfrm>
+          <a:prstGeom prst="ellipse">
+            <a:avLst/>
+          </a:prstGeom>
+          <a:solidFill>
+            <a:srgbClr val="AAEEFF"/>
+          </a:solidFill>
+          <a:ln w="6350">
+            <a:solidFill>
+              <a:schemeClr val="tx1"/>
+            </a:solidFill>
+          </a:ln>
+        </p:spPr>
+        <p:style>
+          <a:lnRef idx="2">
+            <a:schemeClr val="dk1">
+              <a:shade val="50000"/>
+            </a:schemeClr>
+          </a:lnRef>
+          <a:fillRef idx="1">
+            <a:schemeClr val="dk1"/>
+          </a:fillRef>
+          <a:effectRef idx="0">
+            <a:schemeClr val="dk1"/>
+          </a:effectRef>
+          <a:fontRef idx="minor">
+            <a:schemeClr val="lt1"/>
+          </a:fontRef>
+        </p:style>
+        <p:txBody>
+          <a:bodyPr rtlCol="0" anchor="ctr"/>
+          <a:lstStyle/>
+          <a:p>
+            <a:pPr algn="ctr"/>
+            <a:endParaRPr lang="zh-TW" altLang="en-US"/>
+          </a:p>
+        </p:txBody>
+      </p:sp>
+      <p:sp>
+        <p:nvSpPr>
+          <p:cNvPr id="30" name="橢圓 29">
+            <a:extLst>
+              <a:ext uri="{FF2B5EF4-FFF2-40B4-BE49-F238E27FC236}">
+                <a16:creationId xmlns:a16="http://schemas.microsoft.com/office/drawing/2014/main" id="{4ECA625E-33D8-4015-96EF-1CE4CDC096B3}"/>
+              </a:ext>
+            </a:extLst>
+          </p:cNvPr>
+          <p:cNvSpPr/>
+          <p:nvPr/>
+        </p:nvSpPr>
+        <p:spPr>
+          <a:xfrm>
+            <a:off x="7404993" y="644994"/>
+            <a:ext cx="173669" cy="173664"/>
+          </a:xfrm>
+          <a:prstGeom prst="ellipse">
+            <a:avLst/>
+          </a:prstGeom>
+          <a:solidFill>
+            <a:srgbClr val="AAEEFF"/>
+          </a:solidFill>
+          <a:ln w="6350">
+            <a:solidFill>
+              <a:schemeClr val="tx1"/>
+            </a:solidFill>
+          </a:ln>
+        </p:spPr>
+        <p:style>
+          <a:lnRef idx="2">
+            <a:schemeClr val="dk1">
+              <a:shade val="50000"/>
+            </a:schemeClr>
+          </a:lnRef>
+          <a:fillRef idx="1">
+            <a:schemeClr val="dk1"/>
+          </a:fillRef>
+          <a:effectRef idx="0">
+            <a:schemeClr val="dk1"/>
+          </a:effectRef>
+          <a:fontRef idx="minor">
+            <a:schemeClr val="lt1"/>
+          </a:fontRef>
+        </p:style>
+        <p:txBody>
+          <a:bodyPr rtlCol="0" anchor="ctr"/>
+          <a:lstStyle/>
+          <a:p>
+            <a:pPr algn="ctr"/>
+            <a:endParaRPr lang="zh-TW" altLang="en-US"/>
+          </a:p>
+        </p:txBody>
+      </p:sp>
+      <p:sp>
+        <p:nvSpPr>
+          <p:cNvPr id="31" name="橢圓 30">
+            <a:extLst>
+              <a:ext uri="{FF2B5EF4-FFF2-40B4-BE49-F238E27FC236}">
+                <a16:creationId xmlns:a16="http://schemas.microsoft.com/office/drawing/2014/main" id="{5BCA3EA5-51EA-41DA-92C9-8A0931B4D48D}"/>
+              </a:ext>
+            </a:extLst>
+          </p:cNvPr>
+          <p:cNvSpPr/>
+          <p:nvPr/>
+        </p:nvSpPr>
+        <p:spPr>
+          <a:xfrm>
+            <a:off x="6537723" y="2137418"/>
+            <a:ext cx="173669" cy="173664"/>
+          </a:xfrm>
+          <a:prstGeom prst="ellipse">
+            <a:avLst/>
+          </a:prstGeom>
+          <a:solidFill>
+            <a:srgbClr val="AAEEFF"/>
+          </a:solidFill>
+          <a:ln w="6350">
+            <a:solidFill>
+              <a:schemeClr val="tx1"/>
+            </a:solidFill>
+          </a:ln>
+        </p:spPr>
+        <p:style>
+          <a:lnRef idx="2">
+            <a:schemeClr val="dk1">
+              <a:shade val="50000"/>
+            </a:schemeClr>
+          </a:lnRef>
+          <a:fillRef idx="1">
+            <a:schemeClr val="dk1"/>
+          </a:fillRef>
+          <a:effectRef idx="0">
+            <a:schemeClr val="dk1"/>
+          </a:effectRef>
+          <a:fontRef idx="minor">
+            <a:schemeClr val="lt1"/>
+          </a:fontRef>
+        </p:style>
+        <p:txBody>
+          <a:bodyPr rtlCol="0" anchor="ctr"/>
+          <a:lstStyle/>
+          <a:p>
+            <a:pPr algn="ctr"/>
+            <a:endParaRPr lang="zh-TW" altLang="en-US"/>
+          </a:p>
+        </p:txBody>
+      </p:sp>
+      <p:sp>
+        <p:nvSpPr>
+          <p:cNvPr id="32" name="橢圓 31">
+            <a:extLst>
+              <a:ext uri="{FF2B5EF4-FFF2-40B4-BE49-F238E27FC236}">
+                <a16:creationId xmlns:a16="http://schemas.microsoft.com/office/drawing/2014/main" id="{CCD120D3-65A9-46E9-AEB4-97286592E209}"/>
+              </a:ext>
+            </a:extLst>
+          </p:cNvPr>
+          <p:cNvSpPr/>
+          <p:nvPr/>
+        </p:nvSpPr>
+        <p:spPr>
+          <a:xfrm>
+            <a:off x="6537723" y="1138827"/>
+            <a:ext cx="173669" cy="173664"/>
+          </a:xfrm>
+          <a:prstGeom prst="ellipse">
+            <a:avLst/>
+          </a:prstGeom>
+          <a:solidFill>
+            <a:srgbClr val="AAEEFF"/>
+          </a:solidFill>
+          <a:ln w="6350">
+            <a:solidFill>
+              <a:schemeClr val="tx1"/>
+            </a:solidFill>
+          </a:ln>
+        </p:spPr>
+        <p:style>
+          <a:lnRef idx="2">
+            <a:schemeClr val="dk1">
+              <a:shade val="50000"/>
+            </a:schemeClr>
+          </a:lnRef>
+          <a:fillRef idx="1">
+            <a:schemeClr val="dk1"/>
+          </a:fillRef>
+          <a:effectRef idx="0">
+            <a:schemeClr val="dk1"/>
+          </a:effectRef>
+          <a:fontRef idx="minor">
+            <a:schemeClr val="lt1"/>
+          </a:fontRef>
+        </p:style>
+        <p:txBody>
+          <a:bodyPr rtlCol="0" anchor="ctr"/>
+          <a:lstStyle/>
+          <a:p>
+            <a:pPr algn="ctr"/>
+            <a:endParaRPr lang="zh-TW" altLang="en-US"/>
+          </a:p>
+        </p:txBody>
+      </p:sp>
+      <p:sp>
+        <p:nvSpPr>
+          <p:cNvPr id="16" name="六邊形 15">
+            <a:extLst>
+              <a:ext uri="{FF2B5EF4-FFF2-40B4-BE49-F238E27FC236}">
+                <a16:creationId xmlns:a16="http://schemas.microsoft.com/office/drawing/2014/main" id="{0A40C1E8-DC9A-419F-AD3D-45C2294D9BB1}"/>
+              </a:ext>
+            </a:extLst>
+          </p:cNvPr>
+          <p:cNvSpPr/>
+          <p:nvPr/>
+        </p:nvSpPr>
+        <p:spPr>
+          <a:xfrm rot="1800000">
+            <a:off x="9112672" y="1090531"/>
+            <a:ext cx="1483948" cy="1279163"/>
+          </a:xfrm>
+          <a:prstGeom prst="hexagon">
+            <a:avLst>
+              <a:gd name="adj" fmla="val 29067"/>
+              <a:gd name="vf" fmla="val 115470"/>
+            </a:avLst>
+          </a:prstGeom>
+          <a:solidFill>
+            <a:schemeClr val="bg1"/>
+          </a:solidFill>
+          <a:ln>
+            <a:solidFill>
+              <a:schemeClr val="tx1"/>
+            </a:solidFill>
+          </a:ln>
+        </p:spPr>
+        <p:style>
+          <a:lnRef idx="2">
+            <a:schemeClr val="accent1">
+              <a:shade val="50000"/>
+            </a:schemeClr>
+          </a:lnRef>
+          <a:fillRef idx="1">
+            <a:schemeClr val="accent1"/>
+          </a:fillRef>
+          <a:effectRef idx="0">
+            <a:schemeClr val="accent1"/>
+          </a:effectRef>
+          <a:fontRef idx="minor">
+            <a:schemeClr val="lt1"/>
+          </a:fontRef>
+        </p:style>
+        <p:txBody>
+          <a:bodyPr rtlCol="0" anchor="ctr"/>
+          <a:lstStyle/>
+          <a:p>
+            <a:pPr algn="ctr"/>
+            <a:endParaRPr lang="zh-TW" altLang="en-US" dirty="0"/>
+          </a:p>
+        </p:txBody>
+      </p:sp>
+      <p:cxnSp>
+        <p:nvCxnSpPr>
+          <p:cNvPr id="17" name="直線單箭頭接點 16">
+            <a:extLst>
+              <a:ext uri="{FF2B5EF4-FFF2-40B4-BE49-F238E27FC236}">
+                <a16:creationId xmlns:a16="http://schemas.microsoft.com/office/drawing/2014/main" id="{E4CBEF06-A237-42F4-AD45-CDA3D24F9149}"/>
+              </a:ext>
+            </a:extLst>
+          </p:cNvPr>
+          <p:cNvCxnSpPr>
+            <a:cxnSpLocks/>
+          </p:cNvCxnSpPr>
+          <p:nvPr/>
+        </p:nvCxnSpPr>
+        <p:spPr>
+          <a:xfrm>
+            <a:off x="9744568" y="1730112"/>
+            <a:ext cx="468000" cy="0"/>
+          </a:xfrm>
+          <a:prstGeom prst="straightConnector1">
+            <a:avLst/>
+          </a:prstGeom>
+          <a:solidFill>
+            <a:schemeClr val="bg1"/>
+          </a:solidFill>
+          <a:ln>
+            <a:tailEnd type="triangle"/>
+          </a:ln>
+        </p:spPr>
+        <p:style>
+          <a:lnRef idx="2">
+            <a:schemeClr val="dk1"/>
+          </a:lnRef>
+          <a:fillRef idx="0">
+            <a:schemeClr val="dk1"/>
+          </a:fillRef>
+          <a:effectRef idx="1">
+            <a:schemeClr val="dk1"/>
+          </a:effectRef>
+          <a:fontRef idx="minor">
+            <a:schemeClr val="tx1"/>
+          </a:fontRef>
+        </p:style>
+      </p:cxnSp>
+      <p:cxnSp>
+        <p:nvCxnSpPr>
+          <p:cNvPr id="18" name="直線單箭頭接點 17">
+            <a:extLst>
+              <a:ext uri="{FF2B5EF4-FFF2-40B4-BE49-F238E27FC236}">
+                <a16:creationId xmlns:a16="http://schemas.microsoft.com/office/drawing/2014/main" id="{5F6D1846-0138-4BAD-930E-83CDBC515EE7}"/>
+              </a:ext>
+            </a:extLst>
+          </p:cNvPr>
+          <p:cNvCxnSpPr>
+            <a:cxnSpLocks/>
+          </p:cNvCxnSpPr>
+          <p:nvPr/>
+        </p:nvCxnSpPr>
+        <p:spPr>
+          <a:xfrm flipV="1">
+            <a:off x="9854646" y="1380856"/>
+            <a:ext cx="0" cy="468000"/>
+          </a:xfrm>
+          <a:prstGeom prst="straightConnector1">
+            <a:avLst/>
+          </a:prstGeom>
+          <a:solidFill>
+            <a:schemeClr val="bg1"/>
+          </a:solidFill>
+          <a:ln>
+            <a:tailEnd type="triangle"/>
+          </a:ln>
+        </p:spPr>
+        <p:style>
+          <a:lnRef idx="2">
+            <a:schemeClr val="dk1"/>
+          </a:lnRef>
+          <a:fillRef idx="0">
+            <a:schemeClr val="dk1"/>
+          </a:fillRef>
+          <a:effectRef idx="1">
+            <a:schemeClr val="dk1"/>
+          </a:effectRef>
+          <a:fontRef idx="minor">
+            <a:schemeClr val="tx1"/>
+          </a:fontRef>
+        </p:style>
+      </p:cxnSp>
+      <mc:AlternateContent xmlns:mc="http://schemas.openxmlformats.org/markup-compatibility/2006">
+        <mc:Choice xmlns:a14="http://schemas.microsoft.com/office/drawing/2010/main" Requires="a14">
+          <p:sp>
+            <p:nvSpPr>
+              <p:cNvPr id="13" name="文字方塊 12">
+                <a:extLst>
+                  <a:ext uri="{FF2B5EF4-FFF2-40B4-BE49-F238E27FC236}">
+                    <a16:creationId xmlns:a16="http://schemas.microsoft.com/office/drawing/2014/main" id="{24881DEE-6CE7-4CE6-BD26-BA2D1F5F5087}"/>
+                  </a:ext>
+                </a:extLst>
+              </p:cNvPr>
+              <p:cNvSpPr txBox="1"/>
+              <p:nvPr/>
+            </p:nvSpPr>
+            <p:spPr>
+              <a:xfrm>
+                <a:off x="10093919" y="1540411"/>
+                <a:ext cx="500693" cy="462382"/>
+              </a:xfrm>
+              <a:prstGeom prst="rect">
+                <a:avLst/>
+              </a:prstGeom>
+              <a:noFill/>
+            </p:spPr>
+            <p:txBody>
+              <a:bodyPr wrap="square" rtlCol="0">
+                <a:spAutoFit/>
+              </a:bodyPr>
+              <a:lstStyle/>
+              <a:p>
+                <a:pPr/>
+                <a14:m>
+                  <m:oMathPara xmlns:m="http://schemas.openxmlformats.org/officeDocument/2006/math">
+                    <m:oMathParaPr>
+                      <m:jc m:val="centerGroup"/>
+                    </m:oMathParaPr>
+                    <m:oMath xmlns:m="http://schemas.openxmlformats.org/officeDocument/2006/math">
+                      <m:sSub>
+                        <m:sSubPr>
+                          <m:ctrlPr>
+                            <a:rPr lang="en-US" altLang="zh-TW" b="0" i="1" smtClean="0">
+                              <a:latin typeface="Cambria Math" panose="02040503050406030204" pitchFamily="18" charset="0"/>
+                            </a:rPr>
+                          </m:ctrlPr>
+                        </m:sSubPr>
+                        <m:e>
+                          <m:r>
+                            <a:rPr lang="en-US" altLang="zh-TW" b="0" i="1" smtClean="0">
+                              <a:latin typeface="Cambria Math" panose="02040503050406030204" pitchFamily="18" charset="0"/>
+                            </a:rPr>
+                            <m:t>𝑘</m:t>
+                          </m:r>
+                        </m:e>
+                        <m:sub>
+                          <m:r>
+                            <a:rPr lang="en-US" altLang="zh-TW" b="0" i="1" smtClean="0">
+                              <a:latin typeface="Cambria Math" panose="02040503050406030204" pitchFamily="18" charset="0"/>
+                            </a:rPr>
+                            <m:t>𝑥</m:t>
+                          </m:r>
+                        </m:sub>
+                      </m:sSub>
+                    </m:oMath>
+                  </m:oMathPara>
+                </a14:m>
+                <a:endParaRPr lang="zh-TW" altLang="en-US" dirty="0"/>
+              </a:p>
+            </p:txBody>
+          </p:sp>
+        </mc:Choice>
+        <mc:Fallback>
+          <p:sp>
+            <p:nvSpPr>
+              <p:cNvPr id="13" name="文字方塊 12">
+                <a:extLst>
+                  <a:ext uri="{FF2B5EF4-FFF2-40B4-BE49-F238E27FC236}">
+                    <a16:creationId xmlns:a16="http://schemas.microsoft.com/office/drawing/2014/main" id="{24881DEE-6CE7-4CE6-BD26-BA2D1F5F5087}"/>
+                  </a:ext>
+                </a:extLst>
+              </p:cNvPr>
+              <p:cNvSpPr txBox="1">
+                <a:spLocks noRot="1" noChangeAspect="1" noMove="1" noResize="1" noEditPoints="1" noAdjustHandles="1" noChangeArrowheads="1" noChangeShapeType="1" noTextEdit="1"/>
+              </p:cNvSpPr>
+              <p:nvPr/>
+            </p:nvSpPr>
+            <p:spPr>
+              <a:xfrm>
+                <a:off x="10093919" y="1540411"/>
+                <a:ext cx="500693" cy="462382"/>
+              </a:xfrm>
+              <a:prstGeom prst="rect">
+                <a:avLst/>
+              </a:prstGeom>
+              <a:blipFill>
+                <a:blip r:embed="rId3"/>
+                <a:stretch>
+                  <a:fillRect/>
+                </a:stretch>
+              </a:blipFill>
+            </p:spPr>
+            <p:txBody>
+              <a:bodyPr/>
+              <a:lstStyle/>
+              <a:p>
+                <a:r>
+                  <a:rPr lang="zh-TW" altLang="en-US">
+                    <a:noFill/>
+                  </a:rPr>
+                  <a:t> </a:t>
+                </a:r>
+              </a:p>
+            </p:txBody>
+          </p:sp>
+        </mc:Fallback>
+      </mc:AlternateContent>
+      <mc:AlternateContent xmlns:mc="http://schemas.openxmlformats.org/markup-compatibility/2006">
+        <mc:Choice xmlns:a14="http://schemas.microsoft.com/office/drawing/2010/main" Requires="a14">
+          <p:sp>
+            <p:nvSpPr>
+              <p:cNvPr id="14" name="文字方塊 13">
+                <a:extLst>
+                  <a:ext uri="{FF2B5EF4-FFF2-40B4-BE49-F238E27FC236}">
+                    <a16:creationId xmlns:a16="http://schemas.microsoft.com/office/drawing/2014/main" id="{1B07889F-0CF2-4623-B113-F4E0CA26EBA2}"/>
+                  </a:ext>
+                </a:extLst>
+              </p:cNvPr>
+              <p:cNvSpPr txBox="1"/>
+              <p:nvPr/>
+            </p:nvSpPr>
+            <p:spPr>
+              <a:xfrm>
+                <a:off x="9653978" y="1034133"/>
+                <a:ext cx="500693" cy="489836"/>
+              </a:xfrm>
+              <a:prstGeom prst="rect">
+                <a:avLst/>
+              </a:prstGeom>
+              <a:noFill/>
+            </p:spPr>
+            <p:txBody>
+              <a:bodyPr wrap="square" rtlCol="0">
+                <a:spAutoFit/>
+              </a:bodyPr>
+              <a:lstStyle/>
+              <a:p>
+                <a:pPr/>
+                <a14:m>
+                  <m:oMathPara xmlns:m="http://schemas.openxmlformats.org/officeDocument/2006/math">
+                    <m:oMathParaPr>
+                      <m:jc m:val="centerGroup"/>
+                    </m:oMathParaPr>
+                    <m:oMath xmlns:m="http://schemas.openxmlformats.org/officeDocument/2006/math">
+                      <m:sSub>
+                        <m:sSubPr>
+                          <m:ctrlPr>
+                            <a:rPr lang="en-US" altLang="zh-TW" b="0" i="1" smtClean="0">
+                              <a:latin typeface="Cambria Math" panose="02040503050406030204" pitchFamily="18" charset="0"/>
+                            </a:rPr>
+                          </m:ctrlPr>
+                        </m:sSubPr>
+                        <m:e>
+                          <m:r>
+                            <a:rPr lang="en-US" altLang="zh-TW" b="0" i="1" smtClean="0">
+                              <a:latin typeface="Cambria Math" panose="02040503050406030204" pitchFamily="18" charset="0"/>
+                            </a:rPr>
+                            <m:t>𝑘</m:t>
+                          </m:r>
+                        </m:e>
+                        <m:sub>
+                          <m:r>
+                            <a:rPr lang="en-US" altLang="zh-TW" b="0" i="1" smtClean="0">
+                              <a:latin typeface="Cambria Math" panose="02040503050406030204" pitchFamily="18" charset="0"/>
+                            </a:rPr>
+                            <m:t>𝑦</m:t>
+                          </m:r>
+                        </m:sub>
+                      </m:sSub>
+                    </m:oMath>
+                  </m:oMathPara>
+                </a14:m>
+                <a:endParaRPr lang="zh-TW" altLang="en-US" dirty="0"/>
+              </a:p>
+            </p:txBody>
+          </p:sp>
+        </mc:Choice>
+        <mc:Fallback>
+          <p:sp>
+            <p:nvSpPr>
+              <p:cNvPr id="14" name="文字方塊 13">
+                <a:extLst>
+                  <a:ext uri="{FF2B5EF4-FFF2-40B4-BE49-F238E27FC236}">
+                    <a16:creationId xmlns:a16="http://schemas.microsoft.com/office/drawing/2014/main" id="{1B07889F-0CF2-4623-B113-F4E0CA26EBA2}"/>
+                  </a:ext>
+                </a:extLst>
+              </p:cNvPr>
+              <p:cNvSpPr txBox="1">
+                <a:spLocks noRot="1" noChangeAspect="1" noMove="1" noResize="1" noEditPoints="1" noAdjustHandles="1" noChangeArrowheads="1" noChangeShapeType="1" noTextEdit="1"/>
+              </p:cNvSpPr>
+              <p:nvPr/>
+            </p:nvSpPr>
+            <p:spPr>
+              <a:xfrm>
+                <a:off x="9653978" y="1034133"/>
+                <a:ext cx="500693" cy="489836"/>
+              </a:xfrm>
+              <a:prstGeom prst="rect">
+                <a:avLst/>
+              </a:prstGeom>
+              <a:blipFill>
+                <a:blip r:embed="rId4"/>
+                <a:stretch>
+                  <a:fillRect/>
+                </a:stretch>
+              </a:blipFill>
+            </p:spPr>
+            <p:txBody>
+              <a:bodyPr/>
+              <a:lstStyle/>
+              <a:p>
+                <a:r>
+                  <a:rPr lang="zh-TW" altLang="en-US">
+                    <a:noFill/>
+                  </a:rPr>
+                  <a:t> </a:t>
+                </a:r>
+              </a:p>
+            </p:txBody>
+          </p:sp>
+        </mc:Fallback>
+      </mc:AlternateContent>
+      <p:sp>
+        <p:nvSpPr>
+          <p:cNvPr id="9" name="文字方塊 8">
+            <a:extLst>
+              <a:ext uri="{FF2B5EF4-FFF2-40B4-BE49-F238E27FC236}">
+                <a16:creationId xmlns:a16="http://schemas.microsoft.com/office/drawing/2014/main" id="{B0F1BF08-50B6-456D-AD43-4D20172C09AB}"/>
+              </a:ext>
+            </a:extLst>
+          </p:cNvPr>
+          <p:cNvSpPr txBox="1"/>
+          <p:nvPr/>
+        </p:nvSpPr>
+        <p:spPr>
+          <a:xfrm>
+            <a:off x="6131598" y="202721"/>
+            <a:ext cx="472614" cy="462382"/>
+          </a:xfrm>
+          <a:prstGeom prst="rect">
+            <a:avLst/>
+          </a:prstGeom>
+          <a:solidFill>
+            <a:schemeClr val="bg1"/>
+          </a:solidFill>
+        </p:spPr>
+        <p:txBody>
+          <a:bodyPr wrap="square" rtlCol="0">
+            <a:spAutoFit/>
+          </a:bodyPr>
+          <a:lstStyle/>
+          <a:p>
+            <a:r>
+              <a:rPr lang="en-US" altLang="zh-TW" dirty="0"/>
+              <a:t>(c)</a:t>
+            </a:r>
+            <a:endParaRPr lang="zh-TW" altLang="en-US" dirty="0"/>
+          </a:p>
+        </p:txBody>
+      </p:sp>
+      <p:sp>
+        <p:nvSpPr>
+          <p:cNvPr id="10" name="文字方塊 9">
+            <a:extLst>
+              <a:ext uri="{FF2B5EF4-FFF2-40B4-BE49-F238E27FC236}">
+                <a16:creationId xmlns:a16="http://schemas.microsoft.com/office/drawing/2014/main" id="{537346B7-D3B8-4123-BE3E-B36E4536CF9F}"/>
+              </a:ext>
+            </a:extLst>
+          </p:cNvPr>
+          <p:cNvSpPr txBox="1"/>
+          <p:nvPr/>
+        </p:nvSpPr>
+        <p:spPr>
+          <a:xfrm>
+            <a:off x="6131598" y="3315080"/>
+            <a:ext cx="472614" cy="462382"/>
+          </a:xfrm>
+          <a:prstGeom prst="rect">
+            <a:avLst/>
+          </a:prstGeom>
+          <a:solidFill>
+            <a:schemeClr val="bg1"/>
+          </a:solidFill>
+        </p:spPr>
+        <p:txBody>
+          <a:bodyPr wrap="square" rtlCol="0">
+            <a:spAutoFit/>
+          </a:bodyPr>
+          <a:lstStyle/>
+          <a:p>
+            <a:r>
+              <a:rPr lang="en-US" altLang="zh-TW" dirty="0"/>
+              <a:t>(d)</a:t>
+            </a:r>
+            <a:endParaRPr lang="zh-TW" altLang="en-US" dirty="0"/>
+          </a:p>
+        </p:txBody>
+      </p:sp>
+      <mc:AlternateContent xmlns:mc="http://schemas.openxmlformats.org/markup-compatibility/2006">
+        <mc:Choice xmlns:a14="http://schemas.microsoft.com/office/drawing/2010/main" Requires="a14">
+          <p:sp>
+            <p:nvSpPr>
+              <p:cNvPr id="37" name="文字方塊 36">
+                <a:extLst>
+                  <a:ext uri="{FF2B5EF4-FFF2-40B4-BE49-F238E27FC236}">
+                    <a16:creationId xmlns:a16="http://schemas.microsoft.com/office/drawing/2014/main" id="{473B1D4D-197E-454B-873E-F620A370BF47}"/>
+                  </a:ext>
+                </a:extLst>
+              </p:cNvPr>
+              <p:cNvSpPr txBox="1"/>
+              <p:nvPr/>
+            </p:nvSpPr>
+            <p:spPr>
+              <a:xfrm>
+                <a:off x="10369630" y="1096406"/>
+                <a:ext cx="500693" cy="369332"/>
+              </a:xfrm>
+              <a:prstGeom prst="rect">
+                <a:avLst/>
+              </a:prstGeom>
+              <a:noFill/>
+            </p:spPr>
+            <p:txBody>
+              <a:bodyPr wrap="square" rtlCol="0">
+                <a:spAutoFit/>
+              </a:bodyPr>
+              <a:lstStyle/>
+              <a:p>
+                <a:pPr/>
+                <a14:m>
+                  <m:oMathPara xmlns:m="http://schemas.openxmlformats.org/officeDocument/2006/math">
+                    <m:oMathParaPr>
+                      <m:jc m:val="centerGroup"/>
+                    </m:oMathParaPr>
+                    <m:oMath xmlns:m="http://schemas.openxmlformats.org/officeDocument/2006/math">
+                      <m:r>
+                        <a:rPr lang="en-US" altLang="zh-TW" b="0" i="1" smtClean="0">
+                          <a:latin typeface="Cambria Math" panose="02040503050406030204" pitchFamily="18" charset="0"/>
+                        </a:rPr>
+                        <m:t>𝐾</m:t>
+                      </m:r>
+                    </m:oMath>
+                  </m:oMathPara>
+                </a14:m>
+                <a:endParaRPr lang="zh-TW" altLang="en-US" dirty="0"/>
+              </a:p>
+            </p:txBody>
+          </p:sp>
+        </mc:Choice>
+        <mc:Fallback>
+          <p:sp>
+            <p:nvSpPr>
+              <p:cNvPr id="37" name="文字方塊 36">
+                <a:extLst>
+                  <a:ext uri="{FF2B5EF4-FFF2-40B4-BE49-F238E27FC236}">
+                    <a16:creationId xmlns:a16="http://schemas.microsoft.com/office/drawing/2014/main" id="{473B1D4D-197E-454B-873E-F620A370BF47}"/>
+                  </a:ext>
+                </a:extLst>
+              </p:cNvPr>
+              <p:cNvSpPr txBox="1">
+                <a:spLocks noRot="1" noChangeAspect="1" noMove="1" noResize="1" noEditPoints="1" noAdjustHandles="1" noChangeArrowheads="1" noChangeShapeType="1" noTextEdit="1"/>
+              </p:cNvSpPr>
+              <p:nvPr/>
+            </p:nvSpPr>
+            <p:spPr>
+              <a:xfrm>
+                <a:off x="10369630" y="1096406"/>
+                <a:ext cx="500693" cy="369332"/>
+              </a:xfrm>
+              <a:prstGeom prst="rect">
+                <a:avLst/>
+              </a:prstGeom>
+              <a:blipFill>
+                <a:blip r:embed="rId5"/>
+                <a:stretch>
+                  <a:fillRect/>
+                </a:stretch>
+              </a:blipFill>
+            </p:spPr>
+            <p:txBody>
+              <a:bodyPr/>
+              <a:lstStyle/>
+              <a:p>
+                <a:r>
+                  <a:rPr lang="zh-TW" altLang="en-US">
+                    <a:noFill/>
+                  </a:rPr>
+                  <a:t> </a:t>
+                </a:r>
+              </a:p>
+            </p:txBody>
+          </p:sp>
+        </mc:Fallback>
+      </mc:AlternateContent>
+      <mc:AlternateContent xmlns:mc="http://schemas.openxmlformats.org/markup-compatibility/2006">
+        <mc:Choice xmlns:a14="http://schemas.microsoft.com/office/drawing/2010/main" Requires="a14">
+          <p:sp>
+            <p:nvSpPr>
+              <p:cNvPr id="38" name="文字方塊 37">
+                <a:extLst>
+                  <a:ext uri="{FF2B5EF4-FFF2-40B4-BE49-F238E27FC236}">
+                    <a16:creationId xmlns:a16="http://schemas.microsoft.com/office/drawing/2014/main" id="{E1EC01B3-2778-468E-99C2-C4F554E7F092}"/>
+                  </a:ext>
+                </a:extLst>
+              </p:cNvPr>
+              <p:cNvSpPr txBox="1"/>
+              <p:nvPr/>
+            </p:nvSpPr>
+            <p:spPr>
+              <a:xfrm>
+                <a:off x="9600010" y="630505"/>
+                <a:ext cx="500693" cy="369332"/>
+              </a:xfrm>
+              <a:prstGeom prst="rect">
+                <a:avLst/>
+              </a:prstGeom>
+              <a:noFill/>
+            </p:spPr>
+            <p:txBody>
+              <a:bodyPr wrap="square" rtlCol="0">
+                <a:spAutoFit/>
+              </a:bodyPr>
+              <a:lstStyle/>
+              <a:p>
+                <a:pPr/>
+                <a14:m>
+                  <m:oMathPara xmlns:m="http://schemas.openxmlformats.org/officeDocument/2006/math">
+                    <m:oMathParaPr>
+                      <m:jc m:val="centerGroup"/>
+                    </m:oMathParaPr>
+                    <m:oMath xmlns:m="http://schemas.openxmlformats.org/officeDocument/2006/math">
+                      <m:r>
+                        <a:rPr lang="en-US" altLang="zh-TW" b="0" i="1" smtClean="0">
+                          <a:latin typeface="Cambria Math" panose="02040503050406030204" pitchFamily="18" charset="0"/>
+                        </a:rPr>
+                        <m:t>𝐾</m:t>
+                      </m:r>
+                      <m:r>
+                        <a:rPr lang="en-US" altLang="zh-TW" i="1" smtClean="0">
+                          <a:latin typeface="Cambria Math" panose="02040503050406030204" pitchFamily="18" charset="0"/>
+                        </a:rPr>
+                        <m:t>’</m:t>
+                      </m:r>
+                    </m:oMath>
+                  </m:oMathPara>
+                </a14:m>
+                <a:endParaRPr lang="zh-TW" altLang="en-US" dirty="0"/>
+              </a:p>
+            </p:txBody>
+          </p:sp>
+        </mc:Choice>
+        <mc:Fallback>
+          <p:sp>
+            <p:nvSpPr>
+              <p:cNvPr id="38" name="文字方塊 37">
+                <a:extLst>
+                  <a:ext uri="{FF2B5EF4-FFF2-40B4-BE49-F238E27FC236}">
+                    <a16:creationId xmlns:a16="http://schemas.microsoft.com/office/drawing/2014/main" id="{E1EC01B3-2778-468E-99C2-C4F554E7F092}"/>
+                  </a:ext>
+                </a:extLst>
+              </p:cNvPr>
+              <p:cNvSpPr txBox="1">
+                <a:spLocks noRot="1" noChangeAspect="1" noMove="1" noResize="1" noEditPoints="1" noAdjustHandles="1" noChangeArrowheads="1" noChangeShapeType="1" noTextEdit="1"/>
+              </p:cNvSpPr>
+              <p:nvPr/>
+            </p:nvSpPr>
+            <p:spPr>
+              <a:xfrm>
+                <a:off x="9600010" y="630505"/>
+                <a:ext cx="500693" cy="369332"/>
+              </a:xfrm>
+              <a:prstGeom prst="rect">
+                <a:avLst/>
+              </a:prstGeom>
+              <a:blipFill>
+                <a:blip r:embed="rId6"/>
+                <a:stretch>
+                  <a:fillRect/>
+                </a:stretch>
+              </a:blipFill>
+            </p:spPr>
+            <p:txBody>
+              <a:bodyPr/>
+              <a:lstStyle/>
+              <a:p>
+                <a:r>
+                  <a:rPr lang="zh-TW" altLang="en-US">
+                    <a:noFill/>
+                  </a:rPr>
+                  <a:t> </a:t>
+                </a:r>
+              </a:p>
+            </p:txBody>
+          </p:sp>
+        </mc:Fallback>
+      </mc:AlternateContent>
+      <p:cxnSp>
+        <p:nvCxnSpPr>
+          <p:cNvPr id="44" name="直線單箭頭接點 43">
+            <a:extLst>
+              <a:ext uri="{FF2B5EF4-FFF2-40B4-BE49-F238E27FC236}">
+                <a16:creationId xmlns:a16="http://schemas.microsoft.com/office/drawing/2014/main" id="{30658E3C-68AF-4AFA-9D8F-878046A3CB8D}"/>
+              </a:ext>
+            </a:extLst>
+          </p:cNvPr>
+          <p:cNvCxnSpPr>
+            <a:cxnSpLocks/>
+          </p:cNvCxnSpPr>
+          <p:nvPr/>
+        </p:nvCxnSpPr>
+        <p:spPr>
+          <a:xfrm>
+            <a:off x="6796929" y="1730112"/>
+            <a:ext cx="468000" cy="0"/>
+          </a:xfrm>
+          <a:prstGeom prst="straightConnector1">
+            <a:avLst/>
+          </a:prstGeom>
+          <a:solidFill>
+            <a:schemeClr val="bg1"/>
+          </a:solidFill>
+          <a:ln>
+            <a:tailEnd type="triangle"/>
+          </a:ln>
+        </p:spPr>
+        <p:style>
+          <a:lnRef idx="2">
+            <a:schemeClr val="dk1"/>
+          </a:lnRef>
+          <a:fillRef idx="0">
+            <a:schemeClr val="dk1"/>
+          </a:fillRef>
+          <a:effectRef idx="1">
+            <a:schemeClr val="dk1"/>
+          </a:effectRef>
+          <a:fontRef idx="minor">
+            <a:schemeClr val="tx1"/>
+          </a:fontRef>
+        </p:style>
+      </p:cxnSp>
+      <p:cxnSp>
+        <p:nvCxnSpPr>
+          <p:cNvPr id="45" name="直線單箭頭接點 44">
+            <a:extLst>
+              <a:ext uri="{FF2B5EF4-FFF2-40B4-BE49-F238E27FC236}">
+                <a16:creationId xmlns:a16="http://schemas.microsoft.com/office/drawing/2014/main" id="{F88649E5-D138-4A41-8B32-5CB2ABEC4B4E}"/>
+              </a:ext>
+            </a:extLst>
+          </p:cNvPr>
+          <p:cNvCxnSpPr>
+            <a:cxnSpLocks/>
+          </p:cNvCxnSpPr>
+          <p:nvPr/>
+        </p:nvCxnSpPr>
+        <p:spPr>
+          <a:xfrm flipV="1">
+            <a:off x="6907006" y="1380856"/>
+            <a:ext cx="0" cy="468000"/>
+          </a:xfrm>
+          <a:prstGeom prst="straightConnector1">
+            <a:avLst/>
+          </a:prstGeom>
+          <a:solidFill>
+            <a:schemeClr val="bg1"/>
+          </a:solidFill>
+          <a:ln>
+            <a:tailEnd type="triangle"/>
+          </a:ln>
+        </p:spPr>
+        <p:style>
+          <a:lnRef idx="2">
+            <a:schemeClr val="dk1"/>
+          </a:lnRef>
+          <a:fillRef idx="0">
+            <a:schemeClr val="dk1"/>
+          </a:fillRef>
+          <a:effectRef idx="1">
+            <a:schemeClr val="dk1"/>
+          </a:effectRef>
+          <a:fontRef idx="minor">
+            <a:schemeClr val="tx1"/>
+          </a:fontRef>
+        </p:style>
+      </p:cxnSp>
+      <mc:AlternateContent xmlns:mc="http://schemas.openxmlformats.org/markup-compatibility/2006">
+        <mc:Choice xmlns:a14="http://schemas.microsoft.com/office/drawing/2010/main" Requires="a14">
+          <p:sp>
+            <p:nvSpPr>
+              <p:cNvPr id="46" name="文字方塊 45">
+                <a:extLst>
+                  <a:ext uri="{FF2B5EF4-FFF2-40B4-BE49-F238E27FC236}">
+                    <a16:creationId xmlns:a16="http://schemas.microsoft.com/office/drawing/2014/main" id="{21849427-CF26-4D15-B1C2-84C965BF4CD0}"/>
+                  </a:ext>
+                </a:extLst>
+              </p:cNvPr>
+              <p:cNvSpPr txBox="1"/>
+              <p:nvPr/>
+            </p:nvSpPr>
+            <p:spPr>
+              <a:xfrm>
+                <a:off x="7029599" y="1621373"/>
+                <a:ext cx="500693" cy="369332"/>
+              </a:xfrm>
+              <a:prstGeom prst="rect">
+                <a:avLst/>
+              </a:prstGeom>
+              <a:noFill/>
+            </p:spPr>
+            <p:txBody>
+              <a:bodyPr wrap="square" rtlCol="0">
+                <a:spAutoFit/>
+              </a:bodyPr>
+              <a:lstStyle/>
+              <a:p>
+                <a:pPr/>
+                <a14:m>
+                  <m:oMathPara xmlns:m="http://schemas.openxmlformats.org/officeDocument/2006/math">
+                    <m:oMathParaPr>
+                      <m:jc m:val="centerGroup"/>
+                    </m:oMathParaPr>
+                    <m:oMath xmlns:m="http://schemas.openxmlformats.org/officeDocument/2006/math">
+                      <m:r>
+                        <a:rPr lang="en-US" altLang="zh-TW" b="0" i="1" smtClean="0">
+                          <a:latin typeface="Cambria Math" panose="02040503050406030204" pitchFamily="18" charset="0"/>
+                        </a:rPr>
+                        <m:t>𝑥</m:t>
+                      </m:r>
+                    </m:oMath>
+                  </m:oMathPara>
+                </a14:m>
+                <a:endParaRPr lang="zh-TW" altLang="en-US" dirty="0"/>
+              </a:p>
+            </p:txBody>
+          </p:sp>
+        </mc:Choice>
+        <mc:Fallback>
+          <p:sp>
+            <p:nvSpPr>
+              <p:cNvPr id="46" name="文字方塊 45">
+                <a:extLst>
+                  <a:ext uri="{FF2B5EF4-FFF2-40B4-BE49-F238E27FC236}">
+                    <a16:creationId xmlns:a16="http://schemas.microsoft.com/office/drawing/2014/main" id="{21849427-CF26-4D15-B1C2-84C965BF4CD0}"/>
+                  </a:ext>
+                </a:extLst>
+              </p:cNvPr>
+              <p:cNvSpPr txBox="1">
+                <a:spLocks noRot="1" noChangeAspect="1" noMove="1" noResize="1" noEditPoints="1" noAdjustHandles="1" noChangeArrowheads="1" noChangeShapeType="1" noTextEdit="1"/>
+              </p:cNvSpPr>
+              <p:nvPr/>
+            </p:nvSpPr>
+            <p:spPr>
+              <a:xfrm>
+                <a:off x="7029599" y="1621373"/>
+                <a:ext cx="500693" cy="369332"/>
+              </a:xfrm>
+              <a:prstGeom prst="rect">
+                <a:avLst/>
+              </a:prstGeom>
+              <a:blipFill>
+                <a:blip r:embed="rId7"/>
+                <a:stretch>
+                  <a:fillRect/>
+                </a:stretch>
+              </a:blipFill>
+            </p:spPr>
+            <p:txBody>
+              <a:bodyPr/>
+              <a:lstStyle/>
+              <a:p>
+                <a:r>
+                  <a:rPr lang="zh-TW" altLang="en-US">
+                    <a:noFill/>
+                  </a:rPr>
+                  <a:t> </a:t>
+                </a:r>
+              </a:p>
+            </p:txBody>
+          </p:sp>
+        </mc:Fallback>
+      </mc:AlternateContent>
+      <mc:AlternateContent xmlns:mc="http://schemas.openxmlformats.org/markup-compatibility/2006">
+        <mc:Choice xmlns:a14="http://schemas.microsoft.com/office/drawing/2010/main" Requires="a14">
+          <p:sp>
+            <p:nvSpPr>
+              <p:cNvPr id="47" name="文字方塊 46">
+                <a:extLst>
+                  <a:ext uri="{FF2B5EF4-FFF2-40B4-BE49-F238E27FC236}">
+                    <a16:creationId xmlns:a16="http://schemas.microsoft.com/office/drawing/2014/main" id="{57A3108B-ED1D-4240-86D1-F021FAA47CA8}"/>
+                  </a:ext>
+                </a:extLst>
+              </p:cNvPr>
+              <p:cNvSpPr txBox="1"/>
+              <p:nvPr/>
+            </p:nvSpPr>
+            <p:spPr>
+              <a:xfrm>
+                <a:off x="6784920" y="1150814"/>
+                <a:ext cx="500693" cy="369332"/>
+              </a:xfrm>
+              <a:prstGeom prst="rect">
+                <a:avLst/>
+              </a:prstGeom>
+              <a:noFill/>
+            </p:spPr>
+            <p:txBody>
+              <a:bodyPr wrap="square" rtlCol="0">
+                <a:spAutoFit/>
+              </a:bodyPr>
+              <a:lstStyle/>
+              <a:p>
+                <a:pPr/>
+                <a14:m>
+                  <m:oMathPara xmlns:m="http://schemas.openxmlformats.org/officeDocument/2006/math">
+                    <m:oMathParaPr>
+                      <m:jc m:val="centerGroup"/>
+                    </m:oMathParaPr>
+                    <m:oMath xmlns:m="http://schemas.openxmlformats.org/officeDocument/2006/math">
+                      <m:r>
+                        <a:rPr lang="en-US" altLang="zh-TW" b="0" i="1" smtClean="0">
+                          <a:latin typeface="Cambria Math" panose="02040503050406030204" pitchFamily="18" charset="0"/>
+                        </a:rPr>
+                        <m:t>𝑦</m:t>
+                      </m:r>
+                    </m:oMath>
+                  </m:oMathPara>
+                </a14:m>
+                <a:endParaRPr lang="zh-TW" altLang="en-US" dirty="0"/>
+              </a:p>
+            </p:txBody>
+          </p:sp>
+        </mc:Choice>
+        <mc:Fallback>
+          <p:sp>
+            <p:nvSpPr>
+              <p:cNvPr id="47" name="文字方塊 46">
+                <a:extLst>
+                  <a:ext uri="{FF2B5EF4-FFF2-40B4-BE49-F238E27FC236}">
+                    <a16:creationId xmlns:a16="http://schemas.microsoft.com/office/drawing/2014/main" id="{57A3108B-ED1D-4240-86D1-F021FAA47CA8}"/>
+                  </a:ext>
+                </a:extLst>
+              </p:cNvPr>
+              <p:cNvSpPr txBox="1">
+                <a:spLocks noRot="1" noChangeAspect="1" noMove="1" noResize="1" noEditPoints="1" noAdjustHandles="1" noChangeArrowheads="1" noChangeShapeType="1" noTextEdit="1"/>
+              </p:cNvSpPr>
+              <p:nvPr/>
+            </p:nvSpPr>
+            <p:spPr>
+              <a:xfrm>
+                <a:off x="6784920" y="1150814"/>
+                <a:ext cx="500693" cy="369332"/>
+              </a:xfrm>
+              <a:prstGeom prst="rect">
+                <a:avLst/>
+              </a:prstGeom>
+              <a:blipFill>
+                <a:blip r:embed="rId8"/>
+                <a:stretch>
+                  <a:fillRect b="-6667"/>
+                </a:stretch>
+              </a:blipFill>
+            </p:spPr>
+            <p:txBody>
+              <a:bodyPr/>
+              <a:lstStyle/>
+              <a:p>
+                <a:r>
+                  <a:rPr lang="zh-TW" altLang="en-US">
+                    <a:noFill/>
+                  </a:rPr>
+                  <a:t> </a:t>
+                </a:r>
+              </a:p>
+            </p:txBody>
+          </p:sp>
+        </mc:Fallback>
+      </mc:AlternateContent>
+      <mc:AlternateContent xmlns:mc="http://schemas.openxmlformats.org/markup-compatibility/2006">
+        <mc:Choice xmlns:a14="http://schemas.microsoft.com/office/drawing/2010/main" Requires="a14">
+          <p:sp>
+            <p:nvSpPr>
+              <p:cNvPr id="48" name="文字方塊 47">
+                <a:extLst>
+                  <a:ext uri="{FF2B5EF4-FFF2-40B4-BE49-F238E27FC236}">
+                    <a16:creationId xmlns:a16="http://schemas.microsoft.com/office/drawing/2014/main" id="{2A110D24-D0A2-4A43-876E-C8B4C8362CF7}"/>
+                  </a:ext>
+                </a:extLst>
+              </p:cNvPr>
+              <p:cNvSpPr txBox="1"/>
+              <p:nvPr/>
+            </p:nvSpPr>
+            <p:spPr>
+              <a:xfrm>
+                <a:off x="10003870" y="821005"/>
+                <a:ext cx="500693" cy="369332"/>
+              </a:xfrm>
+              <a:prstGeom prst="rect">
+                <a:avLst/>
+              </a:prstGeom>
+              <a:noFill/>
+            </p:spPr>
+            <p:txBody>
+              <a:bodyPr wrap="square" rtlCol="0">
+                <a:spAutoFit/>
+              </a:bodyPr>
+              <a:lstStyle/>
+              <a:p>
+                <a:pPr/>
+                <a14:m>
+                  <m:oMathPara xmlns:m="http://schemas.openxmlformats.org/officeDocument/2006/math">
+                    <m:oMathParaPr>
+                      <m:jc m:val="centerGroup"/>
+                    </m:oMathParaPr>
+                    <m:oMath xmlns:m="http://schemas.openxmlformats.org/officeDocument/2006/math">
+                      <m:r>
+                        <a:rPr lang="en-US" altLang="zh-TW" b="0" i="1" smtClean="0">
+                          <a:latin typeface="Cambria Math" panose="02040503050406030204" pitchFamily="18" charset="0"/>
+                        </a:rPr>
+                        <m:t>𝑀</m:t>
+                      </m:r>
+                    </m:oMath>
+                  </m:oMathPara>
+                </a14:m>
+                <a:endParaRPr lang="zh-TW" altLang="en-US" dirty="0"/>
+              </a:p>
+            </p:txBody>
+          </p:sp>
+        </mc:Choice>
+        <mc:Fallback>
+          <p:sp>
+            <p:nvSpPr>
+              <p:cNvPr id="48" name="文字方塊 47">
+                <a:extLst>
+                  <a:ext uri="{FF2B5EF4-FFF2-40B4-BE49-F238E27FC236}">
+                    <a16:creationId xmlns:a16="http://schemas.microsoft.com/office/drawing/2014/main" id="{2A110D24-D0A2-4A43-876E-C8B4C8362CF7}"/>
+                  </a:ext>
+                </a:extLst>
+              </p:cNvPr>
+              <p:cNvSpPr txBox="1">
+                <a:spLocks noRot="1" noChangeAspect="1" noMove="1" noResize="1" noEditPoints="1" noAdjustHandles="1" noChangeArrowheads="1" noChangeShapeType="1" noTextEdit="1"/>
+              </p:cNvSpPr>
+              <p:nvPr/>
+            </p:nvSpPr>
+            <p:spPr>
+              <a:xfrm>
+                <a:off x="10003870" y="821005"/>
+                <a:ext cx="500693" cy="369332"/>
+              </a:xfrm>
+              <a:prstGeom prst="rect">
+                <a:avLst/>
+              </a:prstGeom>
+              <a:blipFill>
+                <a:blip r:embed="rId9"/>
+                <a:stretch>
+                  <a:fillRect/>
+                </a:stretch>
+              </a:blipFill>
+            </p:spPr>
+            <p:txBody>
+              <a:bodyPr/>
+              <a:lstStyle/>
+              <a:p>
+                <a:r>
+                  <a:rPr lang="zh-TW" altLang="en-US">
+                    <a:noFill/>
+                  </a:rPr>
+                  <a:t> </a:t>
+                </a:r>
+              </a:p>
+            </p:txBody>
+          </p:sp>
+        </mc:Fallback>
+      </mc:AlternateContent>
+      <p:sp>
+        <p:nvSpPr>
+          <p:cNvPr id="49" name="橢圓 48">
+            <a:extLst>
+              <a:ext uri="{FF2B5EF4-FFF2-40B4-BE49-F238E27FC236}">
+                <a16:creationId xmlns:a16="http://schemas.microsoft.com/office/drawing/2014/main" id="{19C60B06-0306-4F94-BFF0-66DFCB42995C}"/>
+              </a:ext>
+            </a:extLst>
+          </p:cNvPr>
+          <p:cNvSpPr/>
+          <p:nvPr/>
+        </p:nvSpPr>
+        <p:spPr>
+          <a:xfrm>
+            <a:off x="9808765" y="953698"/>
+            <a:ext cx="72000" cy="72000"/>
+          </a:xfrm>
+          <a:prstGeom prst="ellipse">
+            <a:avLst/>
+          </a:prstGeom>
+          <a:solidFill>
+            <a:schemeClr val="tx1"/>
+          </a:solidFill>
+          <a:ln w="6350">
+            <a:solidFill>
+              <a:schemeClr val="tx1"/>
+            </a:solidFill>
+          </a:ln>
+        </p:spPr>
+        <p:style>
+          <a:lnRef idx="2">
+            <a:schemeClr val="dk1">
+              <a:shade val="50000"/>
+            </a:schemeClr>
+          </a:lnRef>
+          <a:fillRef idx="1">
+            <a:schemeClr val="dk1"/>
+          </a:fillRef>
+          <a:effectRef idx="0">
+            <a:schemeClr val="dk1"/>
+          </a:effectRef>
+          <a:fontRef idx="minor">
+            <a:schemeClr val="lt1"/>
+          </a:fontRef>
+        </p:style>
+        <p:txBody>
+          <a:bodyPr rtlCol="0" anchor="ctr"/>
+          <a:lstStyle/>
+          <a:p>
+            <a:pPr algn="ctr"/>
+            <a:endParaRPr lang="zh-TW" altLang="en-US" dirty="0"/>
+          </a:p>
+        </p:txBody>
+      </p:sp>
+      <p:sp>
+        <p:nvSpPr>
+          <p:cNvPr id="50" name="橢圓 49">
+            <a:extLst>
+              <a:ext uri="{FF2B5EF4-FFF2-40B4-BE49-F238E27FC236}">
+                <a16:creationId xmlns:a16="http://schemas.microsoft.com/office/drawing/2014/main" id="{4B560E75-401F-4BB6-BF64-7E4B3433D8CE}"/>
+              </a:ext>
+            </a:extLst>
+          </p:cNvPr>
+          <p:cNvSpPr/>
+          <p:nvPr/>
+        </p:nvSpPr>
+        <p:spPr>
+          <a:xfrm>
+            <a:off x="10456465" y="1318029"/>
+            <a:ext cx="72000" cy="72000"/>
+          </a:xfrm>
+          <a:prstGeom prst="ellipse">
+            <a:avLst/>
+          </a:prstGeom>
+          <a:solidFill>
+            <a:schemeClr val="tx1"/>
+          </a:solidFill>
+          <a:ln w="6350">
+            <a:solidFill>
+              <a:schemeClr val="tx1"/>
+            </a:solidFill>
+          </a:ln>
+        </p:spPr>
+        <p:style>
+          <a:lnRef idx="2">
+            <a:schemeClr val="dk1">
+              <a:shade val="50000"/>
+            </a:schemeClr>
+          </a:lnRef>
+          <a:fillRef idx="1">
+            <a:schemeClr val="dk1"/>
+          </a:fillRef>
+          <a:effectRef idx="0">
+            <a:schemeClr val="dk1"/>
+          </a:effectRef>
+          <a:fontRef idx="minor">
+            <a:schemeClr val="lt1"/>
+          </a:fontRef>
+        </p:style>
+        <p:txBody>
+          <a:bodyPr rtlCol="0" anchor="ctr"/>
+          <a:lstStyle/>
+          <a:p>
+            <a:pPr algn="ctr"/>
+            <a:endParaRPr lang="zh-TW" altLang="en-US" dirty="0"/>
+          </a:p>
+        </p:txBody>
+      </p:sp>
+      <mc:AlternateContent xmlns:mc="http://schemas.openxmlformats.org/markup-compatibility/2006">
+        <mc:Choice xmlns:a14="http://schemas.microsoft.com/office/drawing/2010/main" Requires="a14">
+          <p:sp>
+            <p:nvSpPr>
+              <p:cNvPr id="51" name="文字方塊 50">
+                <a:extLst>
+                  <a:ext uri="{FF2B5EF4-FFF2-40B4-BE49-F238E27FC236}">
+                    <a16:creationId xmlns:a16="http://schemas.microsoft.com/office/drawing/2014/main" id="{0B148C38-F219-42E5-933C-185C3D6FA5AC}"/>
+                  </a:ext>
+                </a:extLst>
+              </p:cNvPr>
+              <p:cNvSpPr txBox="1"/>
+              <p:nvPr/>
+            </p:nvSpPr>
+            <p:spPr>
+              <a:xfrm>
+                <a:off x="9484758" y="1697305"/>
+                <a:ext cx="500693" cy="369332"/>
+              </a:xfrm>
+              <a:prstGeom prst="rect">
+                <a:avLst/>
+              </a:prstGeom>
+              <a:noFill/>
+            </p:spPr>
+            <p:txBody>
+              <a:bodyPr wrap="square" rtlCol="0">
+                <a:spAutoFit/>
+              </a:bodyPr>
+              <a:lstStyle/>
+              <a:p>
+                <a:pPr/>
+                <a14:m>
+                  <m:oMathPara xmlns:m="http://schemas.openxmlformats.org/officeDocument/2006/math">
+                    <m:oMathParaPr>
+                      <m:jc m:val="centerGroup"/>
+                    </m:oMathParaPr>
+                    <m:oMath xmlns:m="http://schemas.openxmlformats.org/officeDocument/2006/math">
+                      <m:r>
+                        <m:rPr>
+                          <m:sty m:val="p"/>
+                        </m:rPr>
+                        <a:rPr lang="en-US" altLang="zh-TW" b="0" i="0" smtClean="0">
+                          <a:latin typeface="Cambria Math" panose="02040503050406030204" pitchFamily="18" charset="0"/>
+                        </a:rPr>
+                        <m:t>Γ</m:t>
+                      </m:r>
+                    </m:oMath>
+                  </m:oMathPara>
+                </a14:m>
+                <a:endParaRPr lang="zh-TW" altLang="en-US" dirty="0"/>
+              </a:p>
+            </p:txBody>
+          </p:sp>
+        </mc:Choice>
+        <mc:Fallback>
+          <p:sp>
+            <p:nvSpPr>
+              <p:cNvPr id="51" name="文字方塊 50">
+                <a:extLst>
+                  <a:ext uri="{FF2B5EF4-FFF2-40B4-BE49-F238E27FC236}">
+                    <a16:creationId xmlns:a16="http://schemas.microsoft.com/office/drawing/2014/main" id="{0B148C38-F219-42E5-933C-185C3D6FA5AC}"/>
+                  </a:ext>
+                </a:extLst>
+              </p:cNvPr>
+              <p:cNvSpPr txBox="1">
+                <a:spLocks noRot="1" noChangeAspect="1" noMove="1" noResize="1" noEditPoints="1" noAdjustHandles="1" noChangeArrowheads="1" noChangeShapeType="1" noTextEdit="1"/>
+              </p:cNvSpPr>
+              <p:nvPr/>
+            </p:nvSpPr>
+            <p:spPr>
+              <a:xfrm>
+                <a:off x="9484758" y="1697305"/>
+                <a:ext cx="500693" cy="369332"/>
+              </a:xfrm>
+              <a:prstGeom prst="rect">
+                <a:avLst/>
+              </a:prstGeom>
+              <a:blipFill>
+                <a:blip r:embed="rId10"/>
+                <a:stretch>
+                  <a:fillRect/>
+                </a:stretch>
+              </a:blipFill>
+            </p:spPr>
+            <p:txBody>
+              <a:bodyPr/>
+              <a:lstStyle/>
+              <a:p>
+                <a:r>
+                  <a:rPr lang="zh-TW" altLang="en-US">
+                    <a:noFill/>
+                  </a:rPr>
+                  <a:t> </a:t>
+                </a:r>
+              </a:p>
+            </p:txBody>
+          </p:sp>
+        </mc:Fallback>
+      </mc:AlternateContent>
+      <p:sp>
+        <p:nvSpPr>
+          <p:cNvPr id="52" name="橢圓 51">
+            <a:extLst>
+              <a:ext uri="{FF2B5EF4-FFF2-40B4-BE49-F238E27FC236}">
+                <a16:creationId xmlns:a16="http://schemas.microsoft.com/office/drawing/2014/main" id="{10D67287-F92B-4F97-B84E-5D50B63BF77E}"/>
+              </a:ext>
+            </a:extLst>
+          </p:cNvPr>
+          <p:cNvSpPr/>
+          <p:nvPr/>
+        </p:nvSpPr>
+        <p:spPr>
+          <a:xfrm>
+            <a:off x="10132615" y="1135863"/>
+            <a:ext cx="72000" cy="72000"/>
+          </a:xfrm>
+          <a:prstGeom prst="ellipse">
+            <a:avLst/>
+          </a:prstGeom>
+          <a:solidFill>
+            <a:schemeClr val="tx1"/>
+          </a:solidFill>
+          <a:ln w="6350">
+            <a:solidFill>
+              <a:schemeClr val="tx1"/>
+            </a:solidFill>
+          </a:ln>
+        </p:spPr>
+        <p:style>
+          <a:lnRef idx="2">
+            <a:schemeClr val="dk1">
+              <a:shade val="50000"/>
+            </a:schemeClr>
+          </a:lnRef>
+          <a:fillRef idx="1">
+            <a:schemeClr val="dk1"/>
+          </a:fillRef>
+          <a:effectRef idx="0">
+            <a:schemeClr val="dk1"/>
+          </a:effectRef>
+          <a:fontRef idx="minor">
+            <a:schemeClr val="lt1"/>
+          </a:fontRef>
+        </p:style>
+        <p:txBody>
+          <a:bodyPr rtlCol="0" anchor="ctr"/>
+          <a:lstStyle/>
+          <a:p>
+            <a:pPr algn="ctr"/>
+            <a:endParaRPr lang="zh-TW" altLang="en-US" dirty="0"/>
+          </a:p>
+        </p:txBody>
+      </p:sp>
+      <p:sp>
+        <p:nvSpPr>
+          <p:cNvPr id="53" name="橢圓 52">
+            <a:extLst>
+              <a:ext uri="{FF2B5EF4-FFF2-40B4-BE49-F238E27FC236}">
+                <a16:creationId xmlns:a16="http://schemas.microsoft.com/office/drawing/2014/main" id="{ABE37A37-748C-4DA8-BBEF-9530FFFE017B}"/>
+              </a:ext>
+            </a:extLst>
+          </p:cNvPr>
+          <p:cNvSpPr/>
+          <p:nvPr/>
+        </p:nvSpPr>
+        <p:spPr>
+          <a:xfrm>
+            <a:off x="9818646" y="1694112"/>
+            <a:ext cx="72000" cy="72000"/>
+          </a:xfrm>
+          <a:prstGeom prst="ellipse">
+            <a:avLst/>
+          </a:prstGeom>
+          <a:solidFill>
+            <a:schemeClr val="tx1"/>
+          </a:solidFill>
+          <a:ln w="6350">
+            <a:solidFill>
+              <a:schemeClr val="tx1"/>
+            </a:solidFill>
+          </a:ln>
+        </p:spPr>
+        <p:style>
+          <a:lnRef idx="2">
+            <a:schemeClr val="dk1">
+              <a:shade val="50000"/>
+            </a:schemeClr>
+          </a:lnRef>
+          <a:fillRef idx="1">
+            <a:schemeClr val="dk1"/>
+          </a:fillRef>
+          <a:effectRef idx="0">
+            <a:schemeClr val="dk1"/>
+          </a:effectRef>
+          <a:fontRef idx="minor">
+            <a:schemeClr val="lt1"/>
+          </a:fontRef>
+        </p:style>
+        <p:txBody>
+          <a:bodyPr rtlCol="0" anchor="ctr"/>
+          <a:lstStyle/>
+          <a:p>
+            <a:pPr algn="ctr"/>
+            <a:endParaRPr lang="zh-TW" altLang="en-US" dirty="0"/>
+          </a:p>
+        </p:txBody>
+      </p:sp>
+      <p:pic>
+        <p:nvPicPr>
+          <p:cNvPr id="54" name="圖片 53">
+            <a:extLst>
+              <a:ext uri="{FF2B5EF4-FFF2-40B4-BE49-F238E27FC236}">
+                <a16:creationId xmlns:a16="http://schemas.microsoft.com/office/drawing/2014/main" id="{F0F74467-ECA4-4115-A98D-39278A7F3F7F}"/>
+              </a:ext>
+            </a:extLst>
+          </p:cNvPr>
+          <p:cNvPicPr>
+            <a:picLocks noChangeAspect="1"/>
+          </p:cNvPicPr>
+          <p:nvPr/>
+        </p:nvPicPr>
+        <p:blipFill rotWithShape="1">
+          <a:blip r:embed="rId11"/>
+          <a:srcRect l="8603"/>
+          <a:stretch/>
+        </p:blipFill>
+        <p:spPr>
+          <a:xfrm>
+            <a:off x="7148529" y="3600450"/>
+            <a:ext cx="3056086" cy="3086530"/>
+          </a:xfrm>
+          <a:prstGeom prst="rect">
+            <a:avLst/>
+          </a:prstGeom>
+        </p:spPr>
+      </p:pic>
+      <mc:AlternateContent xmlns:mc="http://schemas.openxmlformats.org/markup-compatibility/2006">
+        <mc:Choice xmlns:a14="http://schemas.microsoft.com/office/drawing/2010/main" Requires="a14">
+          <p:sp>
+            <p:nvSpPr>
+              <p:cNvPr id="56" name="文字方塊 55">
+                <a:extLst>
+                  <a:ext uri="{FF2B5EF4-FFF2-40B4-BE49-F238E27FC236}">
+                    <a16:creationId xmlns:a16="http://schemas.microsoft.com/office/drawing/2014/main" id="{792D315E-1AB0-4FD5-AC71-56B13006FDF1}"/>
+                  </a:ext>
+                </a:extLst>
+              </p:cNvPr>
+              <p:cNvSpPr txBox="1"/>
+              <p:nvPr/>
+            </p:nvSpPr>
+            <p:spPr>
+              <a:xfrm>
+                <a:off x="6744669" y="4907280"/>
+                <a:ext cx="563880" cy="369332"/>
+              </a:xfrm>
+              <a:prstGeom prst="rect">
+                <a:avLst/>
+              </a:prstGeom>
+              <a:noFill/>
+            </p:spPr>
+            <p:txBody>
+              <a:bodyPr wrap="square" rtlCol="0">
+                <a:spAutoFit/>
+              </a:bodyPr>
+              <a:lstStyle/>
+              <a:p>
+                <a:pPr/>
+                <a14:m>
+                  <m:oMathPara xmlns:m="http://schemas.openxmlformats.org/officeDocument/2006/math">
+                    <m:oMathParaPr>
+                      <m:jc m:val="centerGroup"/>
+                    </m:oMathParaPr>
+                    <m:oMath xmlns:m="http://schemas.openxmlformats.org/officeDocument/2006/math">
+                      <m:r>
+                        <m:rPr>
+                          <m:sty m:val="p"/>
+                        </m:rPr>
+                        <a:rPr lang="en-US" altLang="zh-TW" i="0" dirty="0" smtClean="0">
+                          <a:latin typeface="Cambria Math" panose="02040503050406030204" pitchFamily="18" charset="0"/>
+                        </a:rPr>
+                        <m:t>eV</m:t>
+                      </m:r>
+                    </m:oMath>
+                  </m:oMathPara>
+                </a14:m>
+                <a:endParaRPr lang="zh-TW" altLang="en-US" dirty="0"/>
+              </a:p>
+            </p:txBody>
+          </p:sp>
+        </mc:Choice>
+        <mc:Fallback>
+          <p:sp>
+            <p:nvSpPr>
+              <p:cNvPr id="56" name="文字方塊 55">
+                <a:extLst>
+                  <a:ext uri="{FF2B5EF4-FFF2-40B4-BE49-F238E27FC236}">
+                    <a16:creationId xmlns:a16="http://schemas.microsoft.com/office/drawing/2014/main" id="{792D315E-1AB0-4FD5-AC71-56B13006FDF1}"/>
+                  </a:ext>
+                </a:extLst>
+              </p:cNvPr>
+              <p:cNvSpPr txBox="1">
+                <a:spLocks noRot="1" noChangeAspect="1" noMove="1" noResize="1" noEditPoints="1" noAdjustHandles="1" noChangeArrowheads="1" noChangeShapeType="1" noTextEdit="1"/>
+              </p:cNvSpPr>
+              <p:nvPr/>
+            </p:nvSpPr>
+            <p:spPr>
+              <a:xfrm>
+                <a:off x="6744669" y="4907280"/>
+                <a:ext cx="563880" cy="369332"/>
+              </a:xfrm>
+              <a:prstGeom prst="rect">
+                <a:avLst/>
+              </a:prstGeom>
+              <a:blipFill>
+                <a:blip r:embed="rId12"/>
+                <a:stretch>
+                  <a:fillRect/>
+                </a:stretch>
+              </a:blipFill>
+            </p:spPr>
+            <p:txBody>
+              <a:bodyPr/>
+              <a:lstStyle/>
+              <a:p>
+                <a:r>
+                  <a:rPr lang="zh-TW" altLang="en-US">
+                    <a:noFill/>
+                  </a:rPr>
+                  <a:t> </a:t>
+                </a:r>
+              </a:p>
+            </p:txBody>
+          </p:sp>
+        </mc:Fallback>
+      </mc:AlternateContent>
     </p:spTree>
     <p:extLst>
       <p:ext uri="{BB962C8B-B14F-4D97-AF65-F5344CB8AC3E}">
